--- a/docs/pptx/whole/ritu-linsubhr-sens-grade3.pptx
+++ b/docs/pptx/whole/ritu-linsubhr-sens-grade3.pptx
@@ -2443,7 +2443,7 @@
           </p:nvSpPr>
           <p:spPr>
             <a:xfrm>
-              <a:off x="2520195" y="2073503"/>
+              <a:off x="2520043" y="2073503"/>
               <a:ext cx="0" cy="3649639"/>
             </a:xfrm>
             <a:custGeom>
@@ -2486,7 +2486,7 @@
           </p:nvSpPr>
           <p:spPr>
             <a:xfrm>
-              <a:off x="4326850" y="2073503"/>
+              <a:off x="4325074" y="2073503"/>
               <a:ext cx="0" cy="3649639"/>
             </a:xfrm>
             <a:custGeom>
@@ -2529,7 +2529,7 @@
           </p:nvSpPr>
           <p:spPr>
             <a:xfrm>
-              <a:off x="6133505" y="2073503"/>
+              <a:off x="6130105" y="2073503"/>
               <a:ext cx="0" cy="3649639"/>
             </a:xfrm>
             <a:custGeom>
@@ -2572,7 +2572,7 @@
           </p:nvSpPr>
           <p:spPr>
             <a:xfrm>
-              <a:off x="7940161" y="2073503"/>
+              <a:off x="7935136" y="2073503"/>
               <a:ext cx="0" cy="3649639"/>
             </a:xfrm>
             <a:custGeom>
@@ -2830,7 +2830,7 @@
           </p:nvSpPr>
           <p:spPr>
             <a:xfrm>
-              <a:off x="1616868" y="2073503"/>
+              <a:off x="1617528" y="2073503"/>
               <a:ext cx="0" cy="3649639"/>
             </a:xfrm>
             <a:custGeom>
@@ -2873,7 +2873,7 @@
           </p:nvSpPr>
           <p:spPr>
             <a:xfrm>
-              <a:off x="3423523" y="2073503"/>
+              <a:off x="3422559" y="2073503"/>
               <a:ext cx="0" cy="3649639"/>
             </a:xfrm>
             <a:custGeom>
@@ -2916,7 +2916,7 @@
           </p:nvSpPr>
           <p:spPr>
             <a:xfrm>
-              <a:off x="5230178" y="2073503"/>
+              <a:off x="5227590" y="2073503"/>
               <a:ext cx="0" cy="3649639"/>
             </a:xfrm>
             <a:custGeom>
@@ -2959,7 +2959,7 @@
           </p:nvSpPr>
           <p:spPr>
             <a:xfrm>
-              <a:off x="7036833" y="2073503"/>
+              <a:off x="7032620" y="2073503"/>
               <a:ext cx="0" cy="3649639"/>
             </a:xfrm>
             <a:custGeom>
@@ -3003,578 +3003,575 @@
           <p:spPr>
             <a:xfrm>
               <a:off x="1172049" y="2073503"/>
-              <a:ext cx="7090630" cy="3408096"/>
+              <a:ext cx="7090630" cy="3409053"/>
             </a:xfrm>
             <a:custGeom>
               <a:avLst/>
               <a:pathLst>
-                <a:path w="7090630" h="3408096">
+                <a:path w="7090630" h="3409053">
                   <a:moveTo>
-                    <a:pt x="855418" y="0"/>
+                    <a:pt x="874821" y="0"/>
                   </a:moveTo>
                   <a:lnTo>
-                    <a:pt x="859470" y="8841"/>
-                  </a:lnTo>
-                  <a:lnTo>
-                    <a:pt x="931092" y="158391"/>
-                  </a:lnTo>
-                  <a:lnTo>
-                    <a:pt x="1002715" y="301505"/>
-                  </a:lnTo>
-                  <a:lnTo>
-                    <a:pt x="1074337" y="438459"/>
-                  </a:lnTo>
-                  <a:lnTo>
-                    <a:pt x="1145960" y="569520"/>
-                  </a:lnTo>
-                  <a:lnTo>
-                    <a:pt x="1217582" y="694940"/>
-                  </a:lnTo>
-                  <a:lnTo>
-                    <a:pt x="1289205" y="814962"/>
-                  </a:lnTo>
-                  <a:lnTo>
-                    <a:pt x="1360827" y="929819"/>
-                  </a:lnTo>
-                  <a:lnTo>
-                    <a:pt x="1432450" y="1039733"/>
-                  </a:lnTo>
-                  <a:lnTo>
-                    <a:pt x="1504073" y="1144916"/>
-                  </a:lnTo>
-                  <a:lnTo>
-                    <a:pt x="1575695" y="1245573"/>
-                  </a:lnTo>
-                  <a:lnTo>
-                    <a:pt x="1647318" y="1341898"/>
-                  </a:lnTo>
-                  <a:lnTo>
-                    <a:pt x="1718940" y="1434077"/>
-                  </a:lnTo>
-                  <a:lnTo>
-                    <a:pt x="1790563" y="1522289"/>
-                  </a:lnTo>
-                  <a:lnTo>
-                    <a:pt x="1862185" y="1606704"/>
-                  </a:lnTo>
-                  <a:lnTo>
-                    <a:pt x="1933808" y="1687487"/>
-                  </a:lnTo>
-                  <a:lnTo>
-                    <a:pt x="2005430" y="1764793"/>
-                  </a:lnTo>
-                  <a:lnTo>
-                    <a:pt x="2077053" y="1838772"/>
-                  </a:lnTo>
-                  <a:lnTo>
-                    <a:pt x="2148675" y="1909567"/>
-                  </a:lnTo>
-                  <a:lnTo>
-                    <a:pt x="2220298" y="1977315"/>
-                  </a:lnTo>
-                  <a:lnTo>
-                    <a:pt x="2291920" y="2042148"/>
-                  </a:lnTo>
-                  <a:lnTo>
-                    <a:pt x="2363543" y="2104190"/>
-                  </a:lnTo>
-                  <a:lnTo>
-                    <a:pt x="2435165" y="2163562"/>
-                  </a:lnTo>
-                  <a:lnTo>
-                    <a:pt x="2506788" y="2220379"/>
-                  </a:lnTo>
-                  <a:lnTo>
-                    <a:pt x="2578410" y="2274751"/>
-                  </a:lnTo>
-                  <a:lnTo>
-                    <a:pt x="2650033" y="2326783"/>
-                  </a:lnTo>
-                  <a:lnTo>
-                    <a:pt x="2721655" y="2376575"/>
-                  </a:lnTo>
-                  <a:lnTo>
-                    <a:pt x="2793278" y="2424225"/>
-                  </a:lnTo>
-                  <a:lnTo>
-                    <a:pt x="2864901" y="2469823"/>
-                  </a:lnTo>
-                  <a:lnTo>
-                    <a:pt x="2936523" y="2513460"/>
-                  </a:lnTo>
-                  <a:lnTo>
-                    <a:pt x="3008146" y="2555218"/>
-                  </a:lnTo>
-                  <a:lnTo>
-                    <a:pt x="3079768" y="2595179"/>
-                  </a:lnTo>
-                  <a:lnTo>
-                    <a:pt x="3151391" y="2633421"/>
-                  </a:lnTo>
-                  <a:lnTo>
-                    <a:pt x="3223013" y="2657543"/>
-                  </a:lnTo>
-                  <a:lnTo>
-                    <a:pt x="3294636" y="2664983"/>
-                  </a:lnTo>
-                  <a:lnTo>
-                    <a:pt x="3366258" y="2672357"/>
-                  </a:lnTo>
-                  <a:lnTo>
-                    <a:pt x="3437881" y="2679664"/>
-                  </a:lnTo>
-                  <a:lnTo>
-                    <a:pt x="3509503" y="2686905"/>
-                  </a:lnTo>
-                  <a:lnTo>
-                    <a:pt x="3581126" y="2694081"/>
-                  </a:lnTo>
-                  <a:lnTo>
-                    <a:pt x="3652748" y="2701192"/>
-                  </a:lnTo>
-                  <a:lnTo>
-                    <a:pt x="3724371" y="2708239"/>
-                  </a:lnTo>
-                  <a:lnTo>
-                    <a:pt x="3795993" y="2715223"/>
-                  </a:lnTo>
-                  <a:lnTo>
-                    <a:pt x="3867616" y="2722144"/>
-                  </a:lnTo>
-                  <a:lnTo>
-                    <a:pt x="3939238" y="2729002"/>
-                  </a:lnTo>
-                  <a:lnTo>
-                    <a:pt x="4010861" y="2735799"/>
-                  </a:lnTo>
-                  <a:lnTo>
-                    <a:pt x="4082483" y="2742535"/>
-                  </a:lnTo>
-                  <a:lnTo>
-                    <a:pt x="4154106" y="2749210"/>
-                  </a:lnTo>
-                  <a:lnTo>
-                    <a:pt x="4225729" y="2755825"/>
-                  </a:lnTo>
-                  <a:lnTo>
-                    <a:pt x="4297351" y="2762380"/>
-                  </a:lnTo>
-                  <a:lnTo>
-                    <a:pt x="4368974" y="2768876"/>
-                  </a:lnTo>
-                  <a:lnTo>
-                    <a:pt x="4440596" y="2775314"/>
-                  </a:lnTo>
-                  <a:lnTo>
-                    <a:pt x="4512219" y="2781694"/>
-                  </a:lnTo>
-                  <a:lnTo>
-                    <a:pt x="4583841" y="2788016"/>
-                  </a:lnTo>
-                  <a:lnTo>
-                    <a:pt x="4655464" y="2794281"/>
-                  </a:lnTo>
-                  <a:lnTo>
-                    <a:pt x="4727086" y="2800490"/>
-                  </a:lnTo>
-                  <a:lnTo>
-                    <a:pt x="4798709" y="2806643"/>
-                  </a:lnTo>
-                  <a:lnTo>
-                    <a:pt x="4870331" y="2812741"/>
-                  </a:lnTo>
-                  <a:lnTo>
-                    <a:pt x="4941954" y="2818783"/>
-                  </a:lnTo>
-                  <a:lnTo>
-                    <a:pt x="5013576" y="2824772"/>
-                  </a:lnTo>
-                  <a:lnTo>
-                    <a:pt x="5085199" y="2830706"/>
-                  </a:lnTo>
-                  <a:lnTo>
-                    <a:pt x="5156821" y="2836587"/>
-                  </a:lnTo>
-                  <a:lnTo>
-                    <a:pt x="5228444" y="2842415"/>
-                  </a:lnTo>
-                  <a:lnTo>
-                    <a:pt x="5300066" y="2848190"/>
-                  </a:lnTo>
-                  <a:lnTo>
-                    <a:pt x="5371689" y="2853914"/>
-                  </a:lnTo>
-                  <a:lnTo>
-                    <a:pt x="5443311" y="2859586"/>
-                  </a:lnTo>
-                  <a:lnTo>
-                    <a:pt x="5514934" y="2865207"/>
-                  </a:lnTo>
-                  <a:lnTo>
-                    <a:pt x="5586557" y="2870777"/>
-                  </a:lnTo>
-                  <a:lnTo>
-                    <a:pt x="5658179" y="2876297"/>
-                  </a:lnTo>
-                  <a:lnTo>
-                    <a:pt x="5729802" y="2881767"/>
-                  </a:lnTo>
-                  <a:lnTo>
-                    <a:pt x="5801424" y="2887188"/>
-                  </a:lnTo>
-                  <a:lnTo>
-                    <a:pt x="5873047" y="2892561"/>
-                  </a:lnTo>
-                  <a:lnTo>
-                    <a:pt x="5944669" y="2897885"/>
-                  </a:lnTo>
-                  <a:lnTo>
-                    <a:pt x="6016292" y="2903161"/>
-                  </a:lnTo>
-                  <a:lnTo>
-                    <a:pt x="6087914" y="2908389"/>
-                  </a:lnTo>
-                  <a:lnTo>
-                    <a:pt x="6159537" y="2913570"/>
-                  </a:lnTo>
-                  <a:lnTo>
-                    <a:pt x="6231159" y="2918705"/>
-                  </a:lnTo>
-                  <a:lnTo>
-                    <a:pt x="6302782" y="2923793"/>
-                  </a:lnTo>
-                  <a:lnTo>
-                    <a:pt x="6374404" y="2928836"/>
-                  </a:lnTo>
-                  <a:lnTo>
-                    <a:pt x="6446027" y="2933833"/>
-                  </a:lnTo>
-                  <a:lnTo>
-                    <a:pt x="6517649" y="2938786"/>
-                  </a:lnTo>
-                  <a:lnTo>
-                    <a:pt x="6589272" y="2943693"/>
-                  </a:lnTo>
-                  <a:lnTo>
-                    <a:pt x="6660894" y="2948557"/>
-                  </a:lnTo>
-                  <a:lnTo>
-                    <a:pt x="6732517" y="2953376"/>
-                  </a:lnTo>
-                  <a:lnTo>
-                    <a:pt x="6804139" y="2958152"/>
-                  </a:lnTo>
-                  <a:lnTo>
-                    <a:pt x="6875762" y="2962886"/>
-                  </a:lnTo>
-                  <a:lnTo>
-                    <a:pt x="6947385" y="2967576"/>
-                  </a:lnTo>
-                  <a:lnTo>
-                    <a:pt x="7019007" y="2972225"/>
-                  </a:lnTo>
-                  <a:lnTo>
-                    <a:pt x="7090630" y="2976831"/>
-                  </a:lnTo>
-                  <a:lnTo>
-                    <a:pt x="7090630" y="3408096"/>
-                  </a:lnTo>
-                  <a:lnTo>
-                    <a:pt x="7019007" y="3404693"/>
-                  </a:lnTo>
-                  <a:lnTo>
-                    <a:pt x="6947385" y="3401138"/>
-                  </a:lnTo>
-                  <a:lnTo>
-                    <a:pt x="6875762" y="3397423"/>
-                  </a:lnTo>
-                  <a:lnTo>
-                    <a:pt x="6804139" y="3393541"/>
-                  </a:lnTo>
-                  <a:lnTo>
-                    <a:pt x="6732517" y="3389484"/>
-                  </a:lnTo>
-                  <a:lnTo>
-                    <a:pt x="6660894" y="3385245"/>
-                  </a:lnTo>
-                  <a:lnTo>
-                    <a:pt x="6589272" y="3380815"/>
-                  </a:lnTo>
-                  <a:lnTo>
-                    <a:pt x="6517649" y="3376186"/>
-                  </a:lnTo>
-                  <a:lnTo>
-                    <a:pt x="6446027" y="3371348"/>
-                  </a:lnTo>
-                  <a:lnTo>
-                    <a:pt x="6374404" y="3366294"/>
-                  </a:lnTo>
-                  <a:lnTo>
-                    <a:pt x="6302782" y="3361011"/>
-                  </a:lnTo>
-                  <a:lnTo>
-                    <a:pt x="6231159" y="3355492"/>
-                  </a:lnTo>
-                  <a:lnTo>
-                    <a:pt x="6159537" y="3349724"/>
-                  </a:lnTo>
-                  <a:lnTo>
-                    <a:pt x="6087914" y="3343696"/>
-                  </a:lnTo>
-                  <a:lnTo>
-                    <a:pt x="6016292" y="3337398"/>
-                  </a:lnTo>
-                  <a:lnTo>
-                    <a:pt x="5944669" y="3330816"/>
-                  </a:lnTo>
-                  <a:lnTo>
-                    <a:pt x="5873047" y="3323939"/>
-                  </a:lnTo>
-                  <a:lnTo>
-                    <a:pt x="5801424" y="3316752"/>
-                  </a:lnTo>
-                  <a:lnTo>
-                    <a:pt x="5729802" y="3309241"/>
-                  </a:lnTo>
-                  <a:lnTo>
-                    <a:pt x="5658179" y="3301394"/>
-                  </a:lnTo>
-                  <a:lnTo>
-                    <a:pt x="5586557" y="3293193"/>
-                  </a:lnTo>
-                  <a:lnTo>
-                    <a:pt x="5514934" y="3284623"/>
-                  </a:lnTo>
-                  <a:lnTo>
-                    <a:pt x="5443311" y="3275668"/>
-                  </a:lnTo>
-                  <a:lnTo>
-                    <a:pt x="5371689" y="3266310"/>
-                  </a:lnTo>
-                  <a:lnTo>
-                    <a:pt x="5300066" y="3256531"/>
-                  </a:lnTo>
-                  <a:lnTo>
-                    <a:pt x="5228444" y="3246313"/>
-                  </a:lnTo>
-                  <a:lnTo>
-                    <a:pt x="5156821" y="3235635"/>
-                  </a:lnTo>
-                  <a:lnTo>
-                    <a:pt x="5085199" y="3224477"/>
-                  </a:lnTo>
-                  <a:lnTo>
-                    <a:pt x="5013576" y="3212816"/>
-                  </a:lnTo>
-                  <a:lnTo>
-                    <a:pt x="4941954" y="3200632"/>
-                  </a:lnTo>
-                  <a:lnTo>
-                    <a:pt x="4870331" y="3187900"/>
-                  </a:lnTo>
-                  <a:lnTo>
-                    <a:pt x="4798709" y="3174595"/>
-                  </a:lnTo>
-                  <a:lnTo>
-                    <a:pt x="4727086" y="3160691"/>
-                  </a:lnTo>
-                  <a:lnTo>
-                    <a:pt x="4655464" y="3146163"/>
-                  </a:lnTo>
-                  <a:lnTo>
-                    <a:pt x="4583841" y="3130981"/>
-                  </a:lnTo>
-                  <a:lnTo>
-                    <a:pt x="4512219" y="3115116"/>
-                  </a:lnTo>
-                  <a:lnTo>
-                    <a:pt x="4440596" y="3098537"/>
-                  </a:lnTo>
-                  <a:lnTo>
-                    <a:pt x="4368974" y="3081213"/>
-                  </a:lnTo>
-                  <a:lnTo>
-                    <a:pt x="4297351" y="3063111"/>
-                  </a:lnTo>
-                  <a:lnTo>
-                    <a:pt x="4225729" y="3044193"/>
-                  </a:lnTo>
-                  <a:lnTo>
-                    <a:pt x="4154106" y="3024426"/>
-                  </a:lnTo>
-                  <a:lnTo>
-                    <a:pt x="4082483" y="3003769"/>
-                  </a:lnTo>
-                  <a:lnTo>
-                    <a:pt x="4010861" y="2982183"/>
-                  </a:lnTo>
-                  <a:lnTo>
-                    <a:pt x="3939238" y="2959626"/>
-                  </a:lnTo>
-                  <a:lnTo>
-                    <a:pt x="3867616" y="2936055"/>
-                  </a:lnTo>
-                  <a:lnTo>
-                    <a:pt x="3795993" y="2911424"/>
-                  </a:lnTo>
-                  <a:lnTo>
-                    <a:pt x="3724371" y="2885685"/>
-                  </a:lnTo>
-                  <a:lnTo>
-                    <a:pt x="3652748" y="2858789"/>
-                  </a:lnTo>
-                  <a:lnTo>
-                    <a:pt x="3581126" y="2830683"/>
-                  </a:lnTo>
-                  <a:lnTo>
-                    <a:pt x="3509503" y="2801313"/>
-                  </a:lnTo>
-                  <a:lnTo>
-                    <a:pt x="3437881" y="2770622"/>
-                  </a:lnTo>
-                  <a:lnTo>
-                    <a:pt x="3366258" y="2738551"/>
-                  </a:lnTo>
-                  <a:lnTo>
-                    <a:pt x="3294636" y="2705037"/>
-                  </a:lnTo>
-                  <a:lnTo>
-                    <a:pt x="3223013" y="2670016"/>
-                  </a:lnTo>
-                  <a:lnTo>
-                    <a:pt x="3151391" y="2650035"/>
-                  </a:lnTo>
-                  <a:lnTo>
-                    <a:pt x="3079768" y="2642459"/>
-                  </a:lnTo>
-                  <a:lnTo>
-                    <a:pt x="3008146" y="2634814"/>
-                  </a:lnTo>
-                  <a:lnTo>
-                    <a:pt x="2936523" y="2627099"/>
-                  </a:lnTo>
-                  <a:lnTo>
-                    <a:pt x="2864901" y="2619315"/>
-                  </a:lnTo>
-                  <a:lnTo>
-                    <a:pt x="2793278" y="2611459"/>
-                  </a:lnTo>
-                  <a:lnTo>
-                    <a:pt x="2721655" y="2603533"/>
-                  </a:lnTo>
-                  <a:lnTo>
-                    <a:pt x="2650033" y="2595534"/>
-                  </a:lnTo>
-                  <a:lnTo>
-                    <a:pt x="2578410" y="2587463"/>
-                  </a:lnTo>
-                  <a:lnTo>
-                    <a:pt x="2506788" y="2579318"/>
-                  </a:lnTo>
-                  <a:lnTo>
-                    <a:pt x="2435165" y="2571099"/>
-                  </a:lnTo>
-                  <a:lnTo>
-                    <a:pt x="2363543" y="2562805"/>
-                  </a:lnTo>
-                  <a:lnTo>
-                    <a:pt x="2291920" y="2554437"/>
-                  </a:lnTo>
-                  <a:lnTo>
-                    <a:pt x="2220298" y="2545992"/>
-                  </a:lnTo>
-                  <a:lnTo>
-                    <a:pt x="2148675" y="2537470"/>
-                  </a:lnTo>
-                  <a:lnTo>
-                    <a:pt x="2077053" y="2528871"/>
-                  </a:lnTo>
-                  <a:lnTo>
-                    <a:pt x="2005430" y="2520194"/>
-                  </a:lnTo>
-                  <a:lnTo>
-                    <a:pt x="1933808" y="2511438"/>
-                  </a:lnTo>
-                  <a:lnTo>
-                    <a:pt x="1862185" y="2502602"/>
-                  </a:lnTo>
-                  <a:lnTo>
-                    <a:pt x="1790563" y="2493686"/>
-                  </a:lnTo>
-                  <a:lnTo>
-                    <a:pt x="1718940" y="2484689"/>
-                  </a:lnTo>
-                  <a:lnTo>
-                    <a:pt x="1647318" y="2475610"/>
-                  </a:lnTo>
-                  <a:lnTo>
-                    <a:pt x="1575695" y="2466449"/>
-                  </a:lnTo>
-                  <a:lnTo>
-                    <a:pt x="1504073" y="2457205"/>
-                  </a:lnTo>
-                  <a:lnTo>
-                    <a:pt x="1432450" y="2447876"/>
-                  </a:lnTo>
-                  <a:lnTo>
-                    <a:pt x="1360827" y="2438463"/>
-                  </a:lnTo>
-                  <a:lnTo>
-                    <a:pt x="1289205" y="2428964"/>
-                  </a:lnTo>
-                  <a:lnTo>
-                    <a:pt x="1217582" y="2419379"/>
-                  </a:lnTo>
-                  <a:lnTo>
-                    <a:pt x="1145960" y="2409707"/>
-                  </a:lnTo>
-                  <a:lnTo>
-                    <a:pt x="1074337" y="2399947"/>
-                  </a:lnTo>
-                  <a:lnTo>
-                    <a:pt x="1002715" y="2390098"/>
-                  </a:lnTo>
-                  <a:lnTo>
-                    <a:pt x="931092" y="2380160"/>
-                  </a:lnTo>
-                  <a:lnTo>
-                    <a:pt x="859470" y="2370131"/>
-                  </a:lnTo>
-                  <a:lnTo>
-                    <a:pt x="787847" y="2360011"/>
-                  </a:lnTo>
-                  <a:lnTo>
-                    <a:pt x="716225" y="2349800"/>
-                  </a:lnTo>
-                  <a:lnTo>
-                    <a:pt x="644602" y="2339495"/>
-                  </a:lnTo>
-                  <a:lnTo>
-                    <a:pt x="572980" y="2329097"/>
-                  </a:lnTo>
-                  <a:lnTo>
-                    <a:pt x="501357" y="2318605"/>
-                  </a:lnTo>
-                  <a:lnTo>
-                    <a:pt x="429735" y="2308017"/>
-                  </a:lnTo>
-                  <a:lnTo>
-                    <a:pt x="358112" y="2297332"/>
-                  </a:lnTo>
-                  <a:lnTo>
-                    <a:pt x="286490" y="2286551"/>
-                  </a:lnTo>
-                  <a:lnTo>
-                    <a:pt x="214867" y="2275672"/>
-                  </a:lnTo>
-                  <a:lnTo>
-                    <a:pt x="143245" y="2264694"/>
-                  </a:lnTo>
-                  <a:lnTo>
-                    <a:pt x="71622" y="2253616"/>
-                  </a:lnTo>
-                  <a:lnTo>
-                    <a:pt x="0" y="2242437"/>
+                    <a:pt x="931092" y="119646"/>
+                  </a:lnTo>
+                  <a:lnTo>
+                    <a:pt x="1002715" y="265337"/>
+                  </a:lnTo>
+                  <a:lnTo>
+                    <a:pt x="1074337" y="404719"/>
+                  </a:lnTo>
+                  <a:lnTo>
+                    <a:pt x="1145960" y="538065"/>
+                  </a:lnTo>
+                  <a:lnTo>
+                    <a:pt x="1217582" y="665635"/>
+                  </a:lnTo>
+                  <a:lnTo>
+                    <a:pt x="1289205" y="787681"/>
+                  </a:lnTo>
+                  <a:lnTo>
+                    <a:pt x="1360827" y="904442"/>
+                  </a:lnTo>
+                  <a:lnTo>
+                    <a:pt x="1432450" y="1016145"/>
+                  </a:lnTo>
+                  <a:lnTo>
+                    <a:pt x="1504073" y="1123012"/>
+                  </a:lnTo>
+                  <a:lnTo>
+                    <a:pt x="1575695" y="1225250"/>
+                  </a:lnTo>
+                  <a:lnTo>
+                    <a:pt x="1647318" y="1323060"/>
+                  </a:lnTo>
+                  <a:lnTo>
+                    <a:pt x="1718940" y="1416634"/>
+                  </a:lnTo>
+                  <a:lnTo>
+                    <a:pt x="1790563" y="1506156"/>
+                  </a:lnTo>
+                  <a:lnTo>
+                    <a:pt x="1862185" y="1591801"/>
+                  </a:lnTo>
+                  <a:lnTo>
+                    <a:pt x="1933808" y="1673737"/>
+                  </a:lnTo>
+                  <a:lnTo>
+                    <a:pt x="2005430" y="1752124"/>
+                  </a:lnTo>
+                  <a:lnTo>
+                    <a:pt x="2077053" y="1827117"/>
+                  </a:lnTo>
+                  <a:lnTo>
+                    <a:pt x="2148675" y="1898862"/>
+                  </a:lnTo>
+                  <a:lnTo>
+                    <a:pt x="2220298" y="1967499"/>
+                  </a:lnTo>
+                  <a:lnTo>
+                    <a:pt x="2291920" y="2033165"/>
+                  </a:lnTo>
+                  <a:lnTo>
+                    <a:pt x="2363543" y="2095986"/>
+                  </a:lnTo>
+                  <a:lnTo>
+                    <a:pt x="2435165" y="2156087"/>
+                  </a:lnTo>
+                  <a:lnTo>
+                    <a:pt x="2506788" y="2213585"/>
+                  </a:lnTo>
+                  <a:lnTo>
+                    <a:pt x="2578410" y="2268592"/>
+                  </a:lnTo>
+                  <a:lnTo>
+                    <a:pt x="2650033" y="2321218"/>
+                  </a:lnTo>
+                  <a:lnTo>
+                    <a:pt x="2721655" y="2371564"/>
+                  </a:lnTo>
+                  <a:lnTo>
+                    <a:pt x="2793278" y="2419730"/>
+                  </a:lnTo>
+                  <a:lnTo>
+                    <a:pt x="2864901" y="2465810"/>
+                  </a:lnTo>
+                  <a:lnTo>
+                    <a:pt x="2936523" y="2509895"/>
+                  </a:lnTo>
+                  <a:lnTo>
+                    <a:pt x="3008146" y="2552070"/>
+                  </a:lnTo>
+                  <a:lnTo>
+                    <a:pt x="3079768" y="2592419"/>
+                  </a:lnTo>
+                  <a:lnTo>
+                    <a:pt x="3151391" y="2631020"/>
+                  </a:lnTo>
+                  <a:lnTo>
+                    <a:pt x="3223013" y="2657014"/>
+                  </a:lnTo>
+                  <a:lnTo>
+                    <a:pt x="3294636" y="2664247"/>
+                  </a:lnTo>
+                  <a:lnTo>
+                    <a:pt x="3366258" y="2671416"/>
+                  </a:lnTo>
+                  <a:lnTo>
+                    <a:pt x="3437881" y="2678523"/>
+                  </a:lnTo>
+                  <a:lnTo>
+                    <a:pt x="3509503" y="2685568"/>
+                  </a:lnTo>
+                  <a:lnTo>
+                    <a:pt x="3581126" y="2692551"/>
+                  </a:lnTo>
+                  <a:lnTo>
+                    <a:pt x="3652748" y="2699473"/>
+                  </a:lnTo>
+                  <a:lnTo>
+                    <a:pt x="3724371" y="2706335"/>
+                  </a:lnTo>
+                  <a:lnTo>
+                    <a:pt x="3795993" y="2713136"/>
+                  </a:lnTo>
+                  <a:lnTo>
+                    <a:pt x="3867616" y="2719878"/>
+                  </a:lnTo>
+                  <a:lnTo>
+                    <a:pt x="3939238" y="2726561"/>
+                  </a:lnTo>
+                  <a:lnTo>
+                    <a:pt x="4010861" y="2733186"/>
+                  </a:lnTo>
+                  <a:lnTo>
+                    <a:pt x="4082483" y="2739752"/>
+                  </a:lnTo>
+                  <a:lnTo>
+                    <a:pt x="4154106" y="2746261"/>
+                  </a:lnTo>
+                  <a:lnTo>
+                    <a:pt x="4225729" y="2752714"/>
+                  </a:lnTo>
+                  <a:lnTo>
+                    <a:pt x="4297351" y="2759109"/>
+                  </a:lnTo>
+                  <a:lnTo>
+                    <a:pt x="4368974" y="2765449"/>
+                  </a:lnTo>
+                  <a:lnTo>
+                    <a:pt x="4440596" y="2771733"/>
+                  </a:lnTo>
+                  <a:lnTo>
+                    <a:pt x="4512219" y="2777963"/>
+                  </a:lnTo>
+                  <a:lnTo>
+                    <a:pt x="4583841" y="2784138"/>
+                  </a:lnTo>
+                  <a:lnTo>
+                    <a:pt x="4655464" y="2790258"/>
+                  </a:lnTo>
+                  <a:lnTo>
+                    <a:pt x="4727086" y="2796326"/>
+                  </a:lnTo>
+                  <a:lnTo>
+                    <a:pt x="4798709" y="2802340"/>
+                  </a:lnTo>
+                  <a:lnTo>
+                    <a:pt x="4870331" y="2808301"/>
+                  </a:lnTo>
+                  <a:lnTo>
+                    <a:pt x="4941954" y="2814211"/>
+                  </a:lnTo>
+                  <a:lnTo>
+                    <a:pt x="5013576" y="2820068"/>
+                  </a:lnTo>
+                  <a:lnTo>
+                    <a:pt x="5085199" y="2825875"/>
+                  </a:lnTo>
+                  <a:lnTo>
+                    <a:pt x="5156821" y="2831630"/>
+                  </a:lnTo>
+                  <a:lnTo>
+                    <a:pt x="5228444" y="2837336"/>
+                  </a:lnTo>
+                  <a:lnTo>
+                    <a:pt x="5300066" y="2842991"/>
+                  </a:lnTo>
+                  <a:lnTo>
+                    <a:pt x="5371689" y="2848597"/>
+                  </a:lnTo>
+                  <a:lnTo>
+                    <a:pt x="5443311" y="2854154"/>
+                  </a:lnTo>
+                  <a:lnTo>
+                    <a:pt x="5514934" y="2859662"/>
+                  </a:lnTo>
+                  <a:lnTo>
+                    <a:pt x="5586557" y="2865122"/>
+                  </a:lnTo>
+                  <a:lnTo>
+                    <a:pt x="5658179" y="2870534"/>
+                  </a:lnTo>
+                  <a:lnTo>
+                    <a:pt x="5729802" y="2875899"/>
+                  </a:lnTo>
+                  <a:lnTo>
+                    <a:pt x="5801424" y="2881217"/>
+                  </a:lnTo>
+                  <a:lnTo>
+                    <a:pt x="5873047" y="2886489"/>
+                  </a:lnTo>
+                  <a:lnTo>
+                    <a:pt x="5944669" y="2891714"/>
+                  </a:lnTo>
+                  <a:lnTo>
+                    <a:pt x="6016292" y="2896894"/>
+                  </a:lnTo>
+                  <a:lnTo>
+                    <a:pt x="6087914" y="2902028"/>
+                  </a:lnTo>
+                  <a:lnTo>
+                    <a:pt x="6159537" y="2907117"/>
+                  </a:lnTo>
+                  <a:lnTo>
+                    <a:pt x="6231159" y="2912162"/>
+                  </a:lnTo>
+                  <a:lnTo>
+                    <a:pt x="6302782" y="2917163"/>
+                  </a:lnTo>
+                  <a:lnTo>
+                    <a:pt x="6374404" y="2922120"/>
+                  </a:lnTo>
+                  <a:lnTo>
+                    <a:pt x="6446027" y="2927034"/>
+                  </a:lnTo>
+                  <a:lnTo>
+                    <a:pt x="6517649" y="2931904"/>
+                  </a:lnTo>
+                  <a:lnTo>
+                    <a:pt x="6589272" y="2936732"/>
+                  </a:lnTo>
+                  <a:lnTo>
+                    <a:pt x="6660894" y="2941518"/>
+                  </a:lnTo>
+                  <a:lnTo>
+                    <a:pt x="6732517" y="2946262"/>
+                  </a:lnTo>
+                  <a:lnTo>
+                    <a:pt x="6804139" y="2950964"/>
+                  </a:lnTo>
+                  <a:lnTo>
+                    <a:pt x="6875762" y="2955625"/>
+                  </a:lnTo>
+                  <a:lnTo>
+                    <a:pt x="6947385" y="2960246"/>
+                  </a:lnTo>
+                  <a:lnTo>
+                    <a:pt x="7019007" y="2964826"/>
+                  </a:lnTo>
+                  <a:lnTo>
+                    <a:pt x="7090630" y="2969366"/>
+                  </a:lnTo>
+                  <a:lnTo>
+                    <a:pt x="7090630" y="3409053"/>
+                  </a:lnTo>
+                  <a:lnTo>
+                    <a:pt x="7019007" y="3405671"/>
+                  </a:lnTo>
+                  <a:lnTo>
+                    <a:pt x="6947385" y="3402137"/>
+                  </a:lnTo>
+                  <a:lnTo>
+                    <a:pt x="6875762" y="3398443"/>
+                  </a:lnTo>
+                  <a:lnTo>
+                    <a:pt x="6804139" y="3394581"/>
+                  </a:lnTo>
+                  <a:lnTo>
+                    <a:pt x="6732517" y="3390545"/>
+                  </a:lnTo>
+                  <a:lnTo>
+                    <a:pt x="6660894" y="3386326"/>
+                  </a:lnTo>
+                  <a:lnTo>
+                    <a:pt x="6589272" y="3381916"/>
+                  </a:lnTo>
+                  <a:lnTo>
+                    <a:pt x="6517649" y="3377306"/>
+                  </a:lnTo>
+                  <a:lnTo>
+                    <a:pt x="6446027" y="3372488"/>
+                  </a:lnTo>
+                  <a:lnTo>
+                    <a:pt x="6374404" y="3367451"/>
+                  </a:lnTo>
+                  <a:lnTo>
+                    <a:pt x="6302782" y="3362187"/>
+                  </a:lnTo>
+                  <a:lnTo>
+                    <a:pt x="6231159" y="3356684"/>
+                  </a:lnTo>
+                  <a:lnTo>
+                    <a:pt x="6159537" y="3350932"/>
+                  </a:lnTo>
+                  <a:lnTo>
+                    <a:pt x="6087914" y="3344920"/>
+                  </a:lnTo>
+                  <a:lnTo>
+                    <a:pt x="6016292" y="3338635"/>
+                  </a:lnTo>
+                  <a:lnTo>
+                    <a:pt x="5944669" y="3332066"/>
+                  </a:lnTo>
+                  <a:lnTo>
+                    <a:pt x="5873047" y="3325200"/>
+                  </a:lnTo>
+                  <a:lnTo>
+                    <a:pt x="5801424" y="3318023"/>
+                  </a:lnTo>
+                  <a:lnTo>
+                    <a:pt x="5729802" y="3310521"/>
+                  </a:lnTo>
+                  <a:lnTo>
+                    <a:pt x="5658179" y="3302679"/>
+                  </a:lnTo>
+                  <a:lnTo>
+                    <a:pt x="5586557" y="3294483"/>
+                  </a:lnTo>
+                  <a:lnTo>
+                    <a:pt x="5514934" y="3285915"/>
+                  </a:lnTo>
+                  <a:lnTo>
+                    <a:pt x="5443311" y="3276960"/>
+                  </a:lnTo>
+                  <a:lnTo>
+                    <a:pt x="5371689" y="3267599"/>
+                  </a:lnTo>
+                  <a:lnTo>
+                    <a:pt x="5300066" y="3257814"/>
+                  </a:lnTo>
+                  <a:lnTo>
+                    <a:pt x="5228444" y="3247587"/>
+                  </a:lnTo>
+                  <a:lnTo>
+                    <a:pt x="5156821" y="3236896"/>
+                  </a:lnTo>
+                  <a:lnTo>
+                    <a:pt x="5085199" y="3225722"/>
+                  </a:lnTo>
+                  <a:lnTo>
+                    <a:pt x="5013576" y="3214042"/>
+                  </a:lnTo>
+                  <a:lnTo>
+                    <a:pt x="4941954" y="3201833"/>
+                  </a:lnTo>
+                  <a:lnTo>
+                    <a:pt x="4870331" y="3189071"/>
+                  </a:lnTo>
+                  <a:lnTo>
+                    <a:pt x="4798709" y="3175731"/>
+                  </a:lnTo>
+                  <a:lnTo>
+                    <a:pt x="4727086" y="3161788"/>
+                  </a:lnTo>
+                  <a:lnTo>
+                    <a:pt x="4655464" y="3147214"/>
+                  </a:lnTo>
+                  <a:lnTo>
+                    <a:pt x="4583841" y="3131979"/>
+                  </a:lnTo>
+                  <a:lnTo>
+                    <a:pt x="4512219" y="3116056"/>
+                  </a:lnTo>
+                  <a:lnTo>
+                    <a:pt x="4440596" y="3099411"/>
+                  </a:lnTo>
+                  <a:lnTo>
+                    <a:pt x="4368974" y="3082013"/>
+                  </a:lnTo>
+                  <a:lnTo>
+                    <a:pt x="4297351" y="3063827"/>
+                  </a:lnTo>
+                  <a:lnTo>
+                    <a:pt x="4225729" y="3044818"/>
+                  </a:lnTo>
+                  <a:lnTo>
+                    <a:pt x="4154106" y="3024949"/>
+                  </a:lnTo>
+                  <a:lnTo>
+                    <a:pt x="4082483" y="3004180"/>
+                  </a:lnTo>
+                  <a:lnTo>
+                    <a:pt x="4010861" y="2982470"/>
+                  </a:lnTo>
+                  <a:lnTo>
+                    <a:pt x="3939238" y="2959779"/>
+                  </a:lnTo>
+                  <a:lnTo>
+                    <a:pt x="3867616" y="2936060"/>
+                  </a:lnTo>
+                  <a:lnTo>
+                    <a:pt x="3795993" y="2911267"/>
+                  </a:lnTo>
+                  <a:lnTo>
+                    <a:pt x="3724371" y="2885352"/>
+                  </a:lnTo>
+                  <a:lnTo>
+                    <a:pt x="3652748" y="2858263"/>
+                  </a:lnTo>
+                  <a:lnTo>
+                    <a:pt x="3581126" y="2829949"/>
+                  </a:lnTo>
+                  <a:lnTo>
+                    <a:pt x="3509503" y="2800353"/>
+                  </a:lnTo>
+                  <a:lnTo>
+                    <a:pt x="3437881" y="2769417"/>
+                  </a:lnTo>
+                  <a:lnTo>
+                    <a:pt x="3366258" y="2737080"/>
+                  </a:lnTo>
+                  <a:lnTo>
+                    <a:pt x="3294636" y="2703280"/>
+                  </a:lnTo>
+                  <a:lnTo>
+                    <a:pt x="3223013" y="2667950"/>
+                  </a:lnTo>
+                  <a:lnTo>
+                    <a:pt x="3151391" y="2649717"/>
+                  </a:lnTo>
+                  <a:lnTo>
+                    <a:pt x="3079768" y="2642356"/>
+                  </a:lnTo>
+                  <a:lnTo>
+                    <a:pt x="3008146" y="2634929"/>
+                  </a:lnTo>
+                  <a:lnTo>
+                    <a:pt x="2936523" y="2627438"/>
+                  </a:lnTo>
+                  <a:lnTo>
+                    <a:pt x="2864901" y="2619880"/>
+                  </a:lnTo>
+                  <a:lnTo>
+                    <a:pt x="2793278" y="2612255"/>
+                  </a:lnTo>
+                  <a:lnTo>
+                    <a:pt x="2721655" y="2604563"/>
+                  </a:lnTo>
+                  <a:lnTo>
+                    <a:pt x="2650033" y="2596804"/>
+                  </a:lnTo>
+                  <a:lnTo>
+                    <a:pt x="2578410" y="2588975"/>
+                  </a:lnTo>
+                  <a:lnTo>
+                    <a:pt x="2506788" y="2581078"/>
+                  </a:lnTo>
+                  <a:lnTo>
+                    <a:pt x="2435165" y="2573111"/>
+                  </a:lnTo>
+                  <a:lnTo>
+                    <a:pt x="2363543" y="2565074"/>
+                  </a:lnTo>
+                  <a:lnTo>
+                    <a:pt x="2291920" y="2556965"/>
+                  </a:lnTo>
+                  <a:lnTo>
+                    <a:pt x="2220298" y="2548785"/>
+                  </a:lnTo>
+                  <a:lnTo>
+                    <a:pt x="2148675" y="2540533"/>
+                  </a:lnTo>
+                  <a:lnTo>
+                    <a:pt x="2077053" y="2532208"/>
+                  </a:lnTo>
+                  <a:lnTo>
+                    <a:pt x="2005430" y="2523810"/>
+                  </a:lnTo>
+                  <a:lnTo>
+                    <a:pt x="1933808" y="2515338"/>
+                  </a:lnTo>
+                  <a:lnTo>
+                    <a:pt x="1862185" y="2506790"/>
+                  </a:lnTo>
+                  <a:lnTo>
+                    <a:pt x="1790563" y="2498168"/>
+                  </a:lnTo>
+                  <a:lnTo>
+                    <a:pt x="1718940" y="2489469"/>
+                  </a:lnTo>
+                  <a:lnTo>
+                    <a:pt x="1647318" y="2480693"/>
+                  </a:lnTo>
+                  <a:lnTo>
+                    <a:pt x="1575695" y="2471840"/>
+                  </a:lnTo>
+                  <a:lnTo>
+                    <a:pt x="1504073" y="2462909"/>
+                  </a:lnTo>
+                  <a:lnTo>
+                    <a:pt x="1432450" y="2453899"/>
+                  </a:lnTo>
+                  <a:lnTo>
+                    <a:pt x="1360827" y="2444809"/>
+                  </a:lnTo>
+                  <a:lnTo>
+                    <a:pt x="1289205" y="2435640"/>
+                  </a:lnTo>
+                  <a:lnTo>
+                    <a:pt x="1217582" y="2426389"/>
+                  </a:lnTo>
+                  <a:lnTo>
+                    <a:pt x="1145960" y="2417057"/>
+                  </a:lnTo>
+                  <a:lnTo>
+                    <a:pt x="1074337" y="2407642"/>
+                  </a:lnTo>
+                  <a:lnTo>
+                    <a:pt x="1002715" y="2398144"/>
+                  </a:lnTo>
+                  <a:lnTo>
+                    <a:pt x="931092" y="2388562"/>
+                  </a:lnTo>
+                  <a:lnTo>
+                    <a:pt x="859470" y="2378896"/>
+                  </a:lnTo>
+                  <a:lnTo>
+                    <a:pt x="787847" y="2369145"/>
+                  </a:lnTo>
+                  <a:lnTo>
+                    <a:pt x="716225" y="2359307"/>
+                  </a:lnTo>
+                  <a:lnTo>
+                    <a:pt x="644602" y="2349383"/>
+                  </a:lnTo>
+                  <a:lnTo>
+                    <a:pt x="572980" y="2339371"/>
+                  </a:lnTo>
+                  <a:lnTo>
+                    <a:pt x="501357" y="2329270"/>
+                  </a:lnTo>
+                  <a:lnTo>
+                    <a:pt x="429735" y="2319081"/>
+                  </a:lnTo>
+                  <a:lnTo>
+                    <a:pt x="358112" y="2308801"/>
+                  </a:lnTo>
+                  <a:lnTo>
+                    <a:pt x="286490" y="2298431"/>
+                  </a:lnTo>
+                  <a:lnTo>
+                    <a:pt x="214867" y="2287969"/>
+                  </a:lnTo>
+                  <a:lnTo>
+                    <a:pt x="143245" y="2277415"/>
+                  </a:lnTo>
+                  <a:lnTo>
+                    <a:pt x="71622" y="2266768"/>
+                  </a:lnTo>
+                  <a:lnTo>
+                    <a:pt x="0" y="2256027"/>
                   </a:lnTo>
                   <a:close/>
                 </a:path>
@@ -3600,279 +3597,276 @@
           </p:nvSpPr>
           <p:spPr>
             <a:xfrm>
-              <a:off x="2027467" y="2073503"/>
-              <a:ext cx="6235211" cy="2976831"/>
+              <a:off x="2046870" y="2073503"/>
+              <a:ext cx="6215808" cy="2969366"/>
             </a:xfrm>
             <a:custGeom>
               <a:avLst/>
               <a:pathLst>
-                <a:path w="6235211" h="2976831">
+                <a:path w="6215808" h="2969366">
                   <a:moveTo>
                     <a:pt x="0" y="0"/>
                   </a:moveTo>
                   <a:lnTo>
-                    <a:pt x="4051" y="8841"/>
-                  </a:lnTo>
-                  <a:lnTo>
-                    <a:pt x="75674" y="158391"/>
-                  </a:lnTo>
-                  <a:lnTo>
-                    <a:pt x="147297" y="301505"/>
-                  </a:lnTo>
-                  <a:lnTo>
-                    <a:pt x="218919" y="438459"/>
-                  </a:lnTo>
-                  <a:lnTo>
-                    <a:pt x="290542" y="569520"/>
-                  </a:lnTo>
-                  <a:lnTo>
-                    <a:pt x="362164" y="694940"/>
-                  </a:lnTo>
-                  <a:lnTo>
-                    <a:pt x="433787" y="814962"/>
-                  </a:lnTo>
-                  <a:lnTo>
-                    <a:pt x="505409" y="929819"/>
-                  </a:lnTo>
-                  <a:lnTo>
-                    <a:pt x="577032" y="1039733"/>
-                  </a:lnTo>
-                  <a:lnTo>
-                    <a:pt x="648654" y="1144916"/>
-                  </a:lnTo>
-                  <a:lnTo>
-                    <a:pt x="720277" y="1245573"/>
-                  </a:lnTo>
-                  <a:lnTo>
-                    <a:pt x="791899" y="1341898"/>
-                  </a:lnTo>
-                  <a:lnTo>
-                    <a:pt x="863522" y="1434077"/>
-                  </a:lnTo>
-                  <a:lnTo>
-                    <a:pt x="935144" y="1522289"/>
-                  </a:lnTo>
-                  <a:lnTo>
-                    <a:pt x="1006767" y="1606704"/>
-                  </a:lnTo>
-                  <a:lnTo>
-                    <a:pt x="1078389" y="1687487"/>
-                  </a:lnTo>
-                  <a:lnTo>
-                    <a:pt x="1150012" y="1764793"/>
-                  </a:lnTo>
-                  <a:lnTo>
-                    <a:pt x="1221634" y="1838772"/>
-                  </a:lnTo>
-                  <a:lnTo>
-                    <a:pt x="1293257" y="1909567"/>
-                  </a:lnTo>
-                  <a:lnTo>
-                    <a:pt x="1364879" y="1977315"/>
-                  </a:lnTo>
-                  <a:lnTo>
-                    <a:pt x="1436502" y="2042148"/>
-                  </a:lnTo>
-                  <a:lnTo>
-                    <a:pt x="1508125" y="2104190"/>
-                  </a:lnTo>
-                  <a:lnTo>
-                    <a:pt x="1579747" y="2163562"/>
-                  </a:lnTo>
-                  <a:lnTo>
-                    <a:pt x="1651370" y="2220379"/>
-                  </a:lnTo>
-                  <a:lnTo>
-                    <a:pt x="1722992" y="2274751"/>
-                  </a:lnTo>
-                  <a:lnTo>
-                    <a:pt x="1794615" y="2326783"/>
-                  </a:lnTo>
-                  <a:lnTo>
-                    <a:pt x="1866237" y="2376575"/>
-                  </a:lnTo>
-                  <a:lnTo>
-                    <a:pt x="1937860" y="2424225"/>
-                  </a:lnTo>
-                  <a:lnTo>
-                    <a:pt x="2009482" y="2469823"/>
-                  </a:lnTo>
-                  <a:lnTo>
-                    <a:pt x="2081105" y="2513460"/>
-                  </a:lnTo>
-                  <a:lnTo>
-                    <a:pt x="2152727" y="2555218"/>
-                  </a:lnTo>
-                  <a:lnTo>
-                    <a:pt x="2224350" y="2595179"/>
-                  </a:lnTo>
-                  <a:lnTo>
-                    <a:pt x="2295972" y="2633421"/>
-                  </a:lnTo>
-                  <a:lnTo>
-                    <a:pt x="2367595" y="2657543"/>
-                  </a:lnTo>
-                  <a:lnTo>
-                    <a:pt x="2439217" y="2664983"/>
-                  </a:lnTo>
-                  <a:lnTo>
-                    <a:pt x="2510840" y="2672357"/>
-                  </a:lnTo>
-                  <a:lnTo>
-                    <a:pt x="2582462" y="2679664"/>
-                  </a:lnTo>
-                  <a:lnTo>
-                    <a:pt x="2654085" y="2686905"/>
-                  </a:lnTo>
-                  <a:lnTo>
-                    <a:pt x="2725707" y="2694081"/>
-                  </a:lnTo>
-                  <a:lnTo>
-                    <a:pt x="2797330" y="2701192"/>
-                  </a:lnTo>
-                  <a:lnTo>
-                    <a:pt x="2868953" y="2708239"/>
-                  </a:lnTo>
-                  <a:lnTo>
-                    <a:pt x="2940575" y="2715223"/>
-                  </a:lnTo>
-                  <a:lnTo>
-                    <a:pt x="3012198" y="2722144"/>
-                  </a:lnTo>
-                  <a:lnTo>
-                    <a:pt x="3083820" y="2729002"/>
-                  </a:lnTo>
-                  <a:lnTo>
-                    <a:pt x="3155443" y="2735799"/>
-                  </a:lnTo>
-                  <a:lnTo>
-                    <a:pt x="3227065" y="2742535"/>
-                  </a:lnTo>
-                  <a:lnTo>
-                    <a:pt x="3298688" y="2749210"/>
-                  </a:lnTo>
-                  <a:lnTo>
-                    <a:pt x="3370310" y="2755825"/>
-                  </a:lnTo>
-                  <a:lnTo>
-                    <a:pt x="3441933" y="2762380"/>
-                  </a:lnTo>
-                  <a:lnTo>
-                    <a:pt x="3513555" y="2768876"/>
-                  </a:lnTo>
-                  <a:lnTo>
-                    <a:pt x="3585178" y="2775314"/>
-                  </a:lnTo>
-                  <a:lnTo>
-                    <a:pt x="3656800" y="2781694"/>
-                  </a:lnTo>
-                  <a:lnTo>
-                    <a:pt x="3728423" y="2788016"/>
-                  </a:lnTo>
-                  <a:lnTo>
-                    <a:pt x="3800045" y="2794281"/>
-                  </a:lnTo>
-                  <a:lnTo>
-                    <a:pt x="3871668" y="2800490"/>
-                  </a:lnTo>
-                  <a:lnTo>
-                    <a:pt x="3943290" y="2806643"/>
-                  </a:lnTo>
-                  <a:lnTo>
-                    <a:pt x="4014913" y="2812741"/>
-                  </a:lnTo>
-                  <a:lnTo>
-                    <a:pt x="4086535" y="2818783"/>
-                  </a:lnTo>
-                  <a:lnTo>
-                    <a:pt x="4158158" y="2824772"/>
-                  </a:lnTo>
-                  <a:lnTo>
-                    <a:pt x="4229781" y="2830706"/>
-                  </a:lnTo>
-                  <a:lnTo>
-                    <a:pt x="4301403" y="2836587"/>
-                  </a:lnTo>
-                  <a:lnTo>
-                    <a:pt x="4373026" y="2842415"/>
-                  </a:lnTo>
-                  <a:lnTo>
-                    <a:pt x="4444648" y="2848190"/>
-                  </a:lnTo>
-                  <a:lnTo>
-                    <a:pt x="4516271" y="2853914"/>
-                  </a:lnTo>
-                  <a:lnTo>
-                    <a:pt x="4587893" y="2859586"/>
-                  </a:lnTo>
-                  <a:lnTo>
-                    <a:pt x="4659516" y="2865207"/>
-                  </a:lnTo>
-                  <a:lnTo>
-                    <a:pt x="4731138" y="2870777"/>
-                  </a:lnTo>
-                  <a:lnTo>
-                    <a:pt x="4802761" y="2876297"/>
-                  </a:lnTo>
-                  <a:lnTo>
-                    <a:pt x="4874383" y="2881767"/>
-                  </a:lnTo>
-                  <a:lnTo>
-                    <a:pt x="4946006" y="2887188"/>
-                  </a:lnTo>
-                  <a:lnTo>
-                    <a:pt x="5017628" y="2892561"/>
-                  </a:lnTo>
-                  <a:lnTo>
-                    <a:pt x="5089251" y="2897885"/>
-                  </a:lnTo>
-                  <a:lnTo>
-                    <a:pt x="5160873" y="2903161"/>
-                  </a:lnTo>
-                  <a:lnTo>
-                    <a:pt x="5232496" y="2908389"/>
-                  </a:lnTo>
-                  <a:lnTo>
-                    <a:pt x="5304118" y="2913570"/>
-                  </a:lnTo>
-                  <a:lnTo>
-                    <a:pt x="5375741" y="2918705"/>
-                  </a:lnTo>
-                  <a:lnTo>
-                    <a:pt x="5447363" y="2923793"/>
-                  </a:lnTo>
-                  <a:lnTo>
-                    <a:pt x="5518986" y="2928836"/>
-                  </a:lnTo>
-                  <a:lnTo>
-                    <a:pt x="5590609" y="2933833"/>
-                  </a:lnTo>
-                  <a:lnTo>
-                    <a:pt x="5662231" y="2938786"/>
-                  </a:lnTo>
-                  <a:lnTo>
-                    <a:pt x="5733854" y="2943693"/>
-                  </a:lnTo>
-                  <a:lnTo>
-                    <a:pt x="5805476" y="2948557"/>
-                  </a:lnTo>
-                  <a:lnTo>
-                    <a:pt x="5877099" y="2953376"/>
-                  </a:lnTo>
-                  <a:lnTo>
-                    <a:pt x="5948721" y="2958152"/>
-                  </a:lnTo>
-                  <a:lnTo>
-                    <a:pt x="6020344" y="2962886"/>
-                  </a:lnTo>
-                  <a:lnTo>
-                    <a:pt x="6091966" y="2967576"/>
-                  </a:lnTo>
-                  <a:lnTo>
-                    <a:pt x="6163589" y="2972225"/>
-                  </a:lnTo>
-                  <a:lnTo>
-                    <a:pt x="6235211" y="2976831"/>
+                    <a:pt x="56271" y="119646"/>
+                  </a:lnTo>
+                  <a:lnTo>
+                    <a:pt x="127893" y="265337"/>
+                  </a:lnTo>
+                  <a:lnTo>
+                    <a:pt x="199516" y="404719"/>
+                  </a:lnTo>
+                  <a:lnTo>
+                    <a:pt x="271138" y="538065"/>
+                  </a:lnTo>
+                  <a:lnTo>
+                    <a:pt x="342761" y="665635"/>
+                  </a:lnTo>
+                  <a:lnTo>
+                    <a:pt x="414383" y="787681"/>
+                  </a:lnTo>
+                  <a:lnTo>
+                    <a:pt x="486006" y="904442"/>
+                  </a:lnTo>
+                  <a:lnTo>
+                    <a:pt x="557628" y="1016145"/>
+                  </a:lnTo>
+                  <a:lnTo>
+                    <a:pt x="629251" y="1123012"/>
+                  </a:lnTo>
+                  <a:lnTo>
+                    <a:pt x="700873" y="1225250"/>
+                  </a:lnTo>
+                  <a:lnTo>
+                    <a:pt x="772496" y="1323060"/>
+                  </a:lnTo>
+                  <a:lnTo>
+                    <a:pt x="844119" y="1416634"/>
+                  </a:lnTo>
+                  <a:lnTo>
+                    <a:pt x="915741" y="1506156"/>
+                  </a:lnTo>
+                  <a:lnTo>
+                    <a:pt x="987364" y="1591801"/>
+                  </a:lnTo>
+                  <a:lnTo>
+                    <a:pt x="1058986" y="1673737"/>
+                  </a:lnTo>
+                  <a:lnTo>
+                    <a:pt x="1130609" y="1752124"/>
+                  </a:lnTo>
+                  <a:lnTo>
+                    <a:pt x="1202231" y="1827117"/>
+                  </a:lnTo>
+                  <a:lnTo>
+                    <a:pt x="1273854" y="1898862"/>
+                  </a:lnTo>
+                  <a:lnTo>
+                    <a:pt x="1345476" y="1967499"/>
+                  </a:lnTo>
+                  <a:lnTo>
+                    <a:pt x="1417099" y="2033165"/>
+                  </a:lnTo>
+                  <a:lnTo>
+                    <a:pt x="1488721" y="2095986"/>
+                  </a:lnTo>
+                  <a:lnTo>
+                    <a:pt x="1560344" y="2156087"/>
+                  </a:lnTo>
+                  <a:lnTo>
+                    <a:pt x="1631966" y="2213585"/>
+                  </a:lnTo>
+                  <a:lnTo>
+                    <a:pt x="1703589" y="2268592"/>
+                  </a:lnTo>
+                  <a:lnTo>
+                    <a:pt x="1775211" y="2321218"/>
+                  </a:lnTo>
+                  <a:lnTo>
+                    <a:pt x="1846834" y="2371564"/>
+                  </a:lnTo>
+                  <a:lnTo>
+                    <a:pt x="1918456" y="2419730"/>
+                  </a:lnTo>
+                  <a:lnTo>
+                    <a:pt x="1990079" y="2465810"/>
+                  </a:lnTo>
+                  <a:lnTo>
+                    <a:pt x="2061701" y="2509895"/>
+                  </a:lnTo>
+                  <a:lnTo>
+                    <a:pt x="2133324" y="2552070"/>
+                  </a:lnTo>
+                  <a:lnTo>
+                    <a:pt x="2204947" y="2592419"/>
+                  </a:lnTo>
+                  <a:lnTo>
+                    <a:pt x="2276569" y="2631020"/>
+                  </a:lnTo>
+                  <a:lnTo>
+                    <a:pt x="2348192" y="2657014"/>
+                  </a:lnTo>
+                  <a:lnTo>
+                    <a:pt x="2419814" y="2664247"/>
+                  </a:lnTo>
+                  <a:lnTo>
+                    <a:pt x="2491437" y="2671416"/>
+                  </a:lnTo>
+                  <a:lnTo>
+                    <a:pt x="2563059" y="2678523"/>
+                  </a:lnTo>
+                  <a:lnTo>
+                    <a:pt x="2634682" y="2685568"/>
+                  </a:lnTo>
+                  <a:lnTo>
+                    <a:pt x="2706304" y="2692551"/>
+                  </a:lnTo>
+                  <a:lnTo>
+                    <a:pt x="2777927" y="2699473"/>
+                  </a:lnTo>
+                  <a:lnTo>
+                    <a:pt x="2849549" y="2706335"/>
+                  </a:lnTo>
+                  <a:lnTo>
+                    <a:pt x="2921172" y="2713136"/>
+                  </a:lnTo>
+                  <a:lnTo>
+                    <a:pt x="2992794" y="2719878"/>
+                  </a:lnTo>
+                  <a:lnTo>
+                    <a:pt x="3064417" y="2726561"/>
+                  </a:lnTo>
+                  <a:lnTo>
+                    <a:pt x="3136039" y="2733186"/>
+                  </a:lnTo>
+                  <a:lnTo>
+                    <a:pt x="3207662" y="2739752"/>
+                  </a:lnTo>
+                  <a:lnTo>
+                    <a:pt x="3279284" y="2746261"/>
+                  </a:lnTo>
+                  <a:lnTo>
+                    <a:pt x="3350907" y="2752714"/>
+                  </a:lnTo>
+                  <a:lnTo>
+                    <a:pt x="3422529" y="2759109"/>
+                  </a:lnTo>
+                  <a:lnTo>
+                    <a:pt x="3494152" y="2765449"/>
+                  </a:lnTo>
+                  <a:lnTo>
+                    <a:pt x="3565774" y="2771733"/>
+                  </a:lnTo>
+                  <a:lnTo>
+                    <a:pt x="3637397" y="2777963"/>
+                  </a:lnTo>
+                  <a:lnTo>
+                    <a:pt x="3709020" y="2784138"/>
+                  </a:lnTo>
+                  <a:lnTo>
+                    <a:pt x="3780642" y="2790258"/>
+                  </a:lnTo>
+                  <a:lnTo>
+                    <a:pt x="3852265" y="2796326"/>
+                  </a:lnTo>
+                  <a:lnTo>
+                    <a:pt x="3923887" y="2802340"/>
+                  </a:lnTo>
+                  <a:lnTo>
+                    <a:pt x="3995510" y="2808301"/>
+                  </a:lnTo>
+                  <a:lnTo>
+                    <a:pt x="4067132" y="2814211"/>
+                  </a:lnTo>
+                  <a:lnTo>
+                    <a:pt x="4138755" y="2820068"/>
+                  </a:lnTo>
+                  <a:lnTo>
+                    <a:pt x="4210377" y="2825875"/>
+                  </a:lnTo>
+                  <a:lnTo>
+                    <a:pt x="4282000" y="2831630"/>
+                  </a:lnTo>
+                  <a:lnTo>
+                    <a:pt x="4353622" y="2837336"/>
+                  </a:lnTo>
+                  <a:lnTo>
+                    <a:pt x="4425245" y="2842991"/>
+                  </a:lnTo>
+                  <a:lnTo>
+                    <a:pt x="4496867" y="2848597"/>
+                  </a:lnTo>
+                  <a:lnTo>
+                    <a:pt x="4568490" y="2854154"/>
+                  </a:lnTo>
+                  <a:lnTo>
+                    <a:pt x="4640112" y="2859662"/>
+                  </a:lnTo>
+                  <a:lnTo>
+                    <a:pt x="4711735" y="2865122"/>
+                  </a:lnTo>
+                  <a:lnTo>
+                    <a:pt x="4783357" y="2870534"/>
+                  </a:lnTo>
+                  <a:lnTo>
+                    <a:pt x="4854980" y="2875899"/>
+                  </a:lnTo>
+                  <a:lnTo>
+                    <a:pt x="4926602" y="2881217"/>
+                  </a:lnTo>
+                  <a:lnTo>
+                    <a:pt x="4998225" y="2886489"/>
+                  </a:lnTo>
+                  <a:lnTo>
+                    <a:pt x="5069848" y="2891714"/>
+                  </a:lnTo>
+                  <a:lnTo>
+                    <a:pt x="5141470" y="2896894"/>
+                  </a:lnTo>
+                  <a:lnTo>
+                    <a:pt x="5213093" y="2902028"/>
+                  </a:lnTo>
+                  <a:lnTo>
+                    <a:pt x="5284715" y="2907117"/>
+                  </a:lnTo>
+                  <a:lnTo>
+                    <a:pt x="5356338" y="2912162"/>
+                  </a:lnTo>
+                  <a:lnTo>
+                    <a:pt x="5427960" y="2917163"/>
+                  </a:lnTo>
+                  <a:lnTo>
+                    <a:pt x="5499583" y="2922120"/>
+                  </a:lnTo>
+                  <a:lnTo>
+                    <a:pt x="5571205" y="2927034"/>
+                  </a:lnTo>
+                  <a:lnTo>
+                    <a:pt x="5642828" y="2931904"/>
+                  </a:lnTo>
+                  <a:lnTo>
+                    <a:pt x="5714450" y="2936732"/>
+                  </a:lnTo>
+                  <a:lnTo>
+                    <a:pt x="5786073" y="2941518"/>
+                  </a:lnTo>
+                  <a:lnTo>
+                    <a:pt x="5857695" y="2946262"/>
+                  </a:lnTo>
+                  <a:lnTo>
+                    <a:pt x="5929318" y="2950964"/>
+                  </a:lnTo>
+                  <a:lnTo>
+                    <a:pt x="6000940" y="2955625"/>
+                  </a:lnTo>
+                  <a:lnTo>
+                    <a:pt x="6072563" y="2960246"/>
+                  </a:lnTo>
+                  <a:lnTo>
+                    <a:pt x="6144185" y="2964826"/>
+                  </a:lnTo>
+                  <a:lnTo>
+                    <a:pt x="6215808" y="2969366"/>
                   </a:lnTo>
                 </a:path>
               </a:pathLst>
@@ -3892,309 +3886,309 @@
           </p:nvSpPr>
           <p:spPr>
             <a:xfrm>
-              <a:off x="1172049" y="4315940"/>
-              <a:ext cx="7090630" cy="1165658"/>
+              <a:off x="1172049" y="4329530"/>
+              <a:ext cx="7090630" cy="1153025"/>
             </a:xfrm>
             <a:custGeom>
               <a:avLst/>
               <a:pathLst>
-                <a:path w="7090630" h="1165658">
+                <a:path w="7090630" h="1153025">
                   <a:moveTo>
-                    <a:pt x="7090630" y="1165658"/>
+                    <a:pt x="7090630" y="1153025"/>
                   </a:moveTo>
                   <a:lnTo>
-                    <a:pt x="7019007" y="1162255"/>
-                  </a:lnTo>
-                  <a:lnTo>
-                    <a:pt x="6947385" y="1158700"/>
-                  </a:lnTo>
-                  <a:lnTo>
-                    <a:pt x="6875762" y="1154985"/>
-                  </a:lnTo>
-                  <a:lnTo>
-                    <a:pt x="6804139" y="1151103"/>
-                  </a:lnTo>
-                  <a:lnTo>
-                    <a:pt x="6732517" y="1147046"/>
-                  </a:lnTo>
-                  <a:lnTo>
-                    <a:pt x="6660894" y="1142807"/>
-                  </a:lnTo>
-                  <a:lnTo>
-                    <a:pt x="6589272" y="1138377"/>
-                  </a:lnTo>
-                  <a:lnTo>
-                    <a:pt x="6517649" y="1133748"/>
-                  </a:lnTo>
-                  <a:lnTo>
-                    <a:pt x="6446027" y="1128911"/>
-                  </a:lnTo>
-                  <a:lnTo>
-                    <a:pt x="6374404" y="1123856"/>
-                  </a:lnTo>
-                  <a:lnTo>
-                    <a:pt x="6302782" y="1118574"/>
-                  </a:lnTo>
-                  <a:lnTo>
-                    <a:pt x="6231159" y="1113054"/>
-                  </a:lnTo>
-                  <a:lnTo>
-                    <a:pt x="6159537" y="1107286"/>
-                  </a:lnTo>
-                  <a:lnTo>
-                    <a:pt x="6087914" y="1101259"/>
-                  </a:lnTo>
-                  <a:lnTo>
-                    <a:pt x="6016292" y="1094960"/>
-                  </a:lnTo>
-                  <a:lnTo>
-                    <a:pt x="5944669" y="1088379"/>
-                  </a:lnTo>
-                  <a:lnTo>
-                    <a:pt x="5873047" y="1081501"/>
-                  </a:lnTo>
-                  <a:lnTo>
-                    <a:pt x="5801424" y="1074314"/>
-                  </a:lnTo>
-                  <a:lnTo>
-                    <a:pt x="5729802" y="1066804"/>
-                  </a:lnTo>
-                  <a:lnTo>
-                    <a:pt x="5658179" y="1058956"/>
-                  </a:lnTo>
-                  <a:lnTo>
-                    <a:pt x="5586557" y="1050755"/>
-                  </a:lnTo>
-                  <a:lnTo>
-                    <a:pt x="5514934" y="1042185"/>
-                  </a:lnTo>
-                  <a:lnTo>
-                    <a:pt x="5443311" y="1033230"/>
-                  </a:lnTo>
-                  <a:lnTo>
-                    <a:pt x="5371689" y="1023872"/>
-                  </a:lnTo>
-                  <a:lnTo>
-                    <a:pt x="5300066" y="1014093"/>
-                  </a:lnTo>
-                  <a:lnTo>
-                    <a:pt x="5228444" y="1003875"/>
-                  </a:lnTo>
-                  <a:lnTo>
-                    <a:pt x="5156821" y="993197"/>
-                  </a:lnTo>
-                  <a:lnTo>
-                    <a:pt x="5085199" y="982039"/>
-                  </a:lnTo>
-                  <a:lnTo>
-                    <a:pt x="5013576" y="970379"/>
-                  </a:lnTo>
-                  <a:lnTo>
-                    <a:pt x="4941954" y="958194"/>
-                  </a:lnTo>
-                  <a:lnTo>
-                    <a:pt x="4870331" y="945462"/>
-                  </a:lnTo>
-                  <a:lnTo>
-                    <a:pt x="4798709" y="932157"/>
-                  </a:lnTo>
-                  <a:lnTo>
-                    <a:pt x="4727086" y="918253"/>
-                  </a:lnTo>
-                  <a:lnTo>
-                    <a:pt x="4655464" y="903725"/>
-                  </a:lnTo>
-                  <a:lnTo>
-                    <a:pt x="4583841" y="888543"/>
-                  </a:lnTo>
-                  <a:lnTo>
-                    <a:pt x="4512219" y="872678"/>
-                  </a:lnTo>
-                  <a:lnTo>
-                    <a:pt x="4440596" y="856100"/>
-                  </a:lnTo>
-                  <a:lnTo>
-                    <a:pt x="4368974" y="838776"/>
-                  </a:lnTo>
-                  <a:lnTo>
-                    <a:pt x="4297351" y="820673"/>
-                  </a:lnTo>
-                  <a:lnTo>
-                    <a:pt x="4225729" y="801756"/>
-                  </a:lnTo>
-                  <a:lnTo>
-                    <a:pt x="4154106" y="781988"/>
-                  </a:lnTo>
-                  <a:lnTo>
-                    <a:pt x="4082483" y="761331"/>
-                  </a:lnTo>
-                  <a:lnTo>
-                    <a:pt x="4010861" y="739745"/>
-                  </a:lnTo>
-                  <a:lnTo>
-                    <a:pt x="3939238" y="717188"/>
-                  </a:lnTo>
-                  <a:lnTo>
-                    <a:pt x="3867616" y="693617"/>
-                  </a:lnTo>
-                  <a:lnTo>
-                    <a:pt x="3795993" y="668986"/>
-                  </a:lnTo>
-                  <a:lnTo>
-                    <a:pt x="3724371" y="643247"/>
-                  </a:lnTo>
-                  <a:lnTo>
-                    <a:pt x="3652748" y="616351"/>
-                  </a:lnTo>
-                  <a:lnTo>
-                    <a:pt x="3581126" y="588245"/>
-                  </a:lnTo>
-                  <a:lnTo>
-                    <a:pt x="3509503" y="558875"/>
-                  </a:lnTo>
-                  <a:lnTo>
-                    <a:pt x="3437881" y="528184"/>
-                  </a:lnTo>
-                  <a:lnTo>
-                    <a:pt x="3366258" y="496113"/>
-                  </a:lnTo>
-                  <a:lnTo>
-                    <a:pt x="3294636" y="462599"/>
-                  </a:lnTo>
-                  <a:lnTo>
-                    <a:pt x="3223013" y="427579"/>
-                  </a:lnTo>
-                  <a:lnTo>
-                    <a:pt x="3151391" y="407597"/>
-                  </a:lnTo>
-                  <a:lnTo>
-                    <a:pt x="3079768" y="400021"/>
-                  </a:lnTo>
-                  <a:lnTo>
-                    <a:pt x="3008146" y="392376"/>
-                  </a:lnTo>
-                  <a:lnTo>
-                    <a:pt x="2936523" y="384662"/>
-                  </a:lnTo>
-                  <a:lnTo>
-                    <a:pt x="2864901" y="376877"/>
-                  </a:lnTo>
-                  <a:lnTo>
-                    <a:pt x="2793278" y="369022"/>
-                  </a:lnTo>
-                  <a:lnTo>
-                    <a:pt x="2721655" y="361095"/>
-                  </a:lnTo>
-                  <a:lnTo>
-                    <a:pt x="2650033" y="353096"/>
-                  </a:lnTo>
-                  <a:lnTo>
-                    <a:pt x="2578410" y="345025"/>
-                  </a:lnTo>
-                  <a:lnTo>
-                    <a:pt x="2506788" y="336880"/>
-                  </a:lnTo>
-                  <a:lnTo>
-                    <a:pt x="2435165" y="328661"/>
-                  </a:lnTo>
-                  <a:lnTo>
-                    <a:pt x="2363543" y="320368"/>
-                  </a:lnTo>
-                  <a:lnTo>
-                    <a:pt x="2291920" y="311999"/>
-                  </a:lnTo>
-                  <a:lnTo>
-                    <a:pt x="2220298" y="303554"/>
-                  </a:lnTo>
-                  <a:lnTo>
-                    <a:pt x="2148675" y="295032"/>
-                  </a:lnTo>
-                  <a:lnTo>
-                    <a:pt x="2077053" y="286433"/>
-                  </a:lnTo>
-                  <a:lnTo>
-                    <a:pt x="2005430" y="277756"/>
-                  </a:lnTo>
-                  <a:lnTo>
-                    <a:pt x="1933808" y="269000"/>
-                  </a:lnTo>
-                  <a:lnTo>
-                    <a:pt x="1862185" y="260164"/>
-                  </a:lnTo>
-                  <a:lnTo>
-                    <a:pt x="1790563" y="251248"/>
-                  </a:lnTo>
-                  <a:lnTo>
-                    <a:pt x="1718940" y="242251"/>
-                  </a:lnTo>
-                  <a:lnTo>
-                    <a:pt x="1647318" y="233173"/>
-                  </a:lnTo>
-                  <a:lnTo>
-                    <a:pt x="1575695" y="224011"/>
-                  </a:lnTo>
-                  <a:lnTo>
-                    <a:pt x="1504073" y="214767"/>
-                  </a:lnTo>
-                  <a:lnTo>
-                    <a:pt x="1432450" y="205438"/>
-                  </a:lnTo>
-                  <a:lnTo>
-                    <a:pt x="1360827" y="196025"/>
-                  </a:lnTo>
-                  <a:lnTo>
-                    <a:pt x="1289205" y="186526"/>
-                  </a:lnTo>
-                  <a:lnTo>
-                    <a:pt x="1217582" y="176941"/>
-                  </a:lnTo>
-                  <a:lnTo>
-                    <a:pt x="1145960" y="167269"/>
-                  </a:lnTo>
-                  <a:lnTo>
-                    <a:pt x="1074337" y="157509"/>
-                  </a:lnTo>
-                  <a:lnTo>
-                    <a:pt x="1002715" y="147660"/>
-                  </a:lnTo>
-                  <a:lnTo>
-                    <a:pt x="931092" y="137722"/>
-                  </a:lnTo>
-                  <a:lnTo>
-                    <a:pt x="859470" y="127693"/>
-                  </a:lnTo>
-                  <a:lnTo>
-                    <a:pt x="787847" y="117574"/>
-                  </a:lnTo>
-                  <a:lnTo>
-                    <a:pt x="716225" y="107362"/>
-                  </a:lnTo>
-                  <a:lnTo>
-                    <a:pt x="644602" y="97057"/>
-                  </a:lnTo>
-                  <a:lnTo>
-                    <a:pt x="572980" y="86659"/>
-                  </a:lnTo>
-                  <a:lnTo>
-                    <a:pt x="501357" y="76167"/>
-                  </a:lnTo>
-                  <a:lnTo>
-                    <a:pt x="429735" y="65579"/>
-                  </a:lnTo>
-                  <a:lnTo>
-                    <a:pt x="358112" y="54895"/>
-                  </a:lnTo>
-                  <a:lnTo>
-                    <a:pt x="286490" y="44113"/>
-                  </a:lnTo>
-                  <a:lnTo>
-                    <a:pt x="214867" y="33234"/>
-                  </a:lnTo>
-                  <a:lnTo>
-                    <a:pt x="143245" y="22256"/>
-                  </a:lnTo>
-                  <a:lnTo>
-                    <a:pt x="71622" y="11178"/>
+                    <a:pt x="7019007" y="1149644"/>
+                  </a:lnTo>
+                  <a:lnTo>
+                    <a:pt x="6947385" y="1146109"/>
+                  </a:lnTo>
+                  <a:lnTo>
+                    <a:pt x="6875762" y="1142415"/>
+                  </a:lnTo>
+                  <a:lnTo>
+                    <a:pt x="6804139" y="1138554"/>
+                  </a:lnTo>
+                  <a:lnTo>
+                    <a:pt x="6732517" y="1134517"/>
+                  </a:lnTo>
+                  <a:lnTo>
+                    <a:pt x="6660894" y="1130298"/>
+                  </a:lnTo>
+                  <a:lnTo>
+                    <a:pt x="6589272" y="1125888"/>
+                  </a:lnTo>
+                  <a:lnTo>
+                    <a:pt x="6517649" y="1121278"/>
+                  </a:lnTo>
+                  <a:lnTo>
+                    <a:pt x="6446027" y="1116460"/>
+                  </a:lnTo>
+                  <a:lnTo>
+                    <a:pt x="6374404" y="1111424"/>
+                  </a:lnTo>
+                  <a:lnTo>
+                    <a:pt x="6302782" y="1106159"/>
+                  </a:lnTo>
+                  <a:lnTo>
+                    <a:pt x="6231159" y="1100656"/>
+                  </a:lnTo>
+                  <a:lnTo>
+                    <a:pt x="6159537" y="1094904"/>
+                  </a:lnTo>
+                  <a:lnTo>
+                    <a:pt x="6087914" y="1088892"/>
+                  </a:lnTo>
+                  <a:lnTo>
+                    <a:pt x="6016292" y="1082608"/>
+                  </a:lnTo>
+                  <a:lnTo>
+                    <a:pt x="5944669" y="1076039"/>
+                  </a:lnTo>
+                  <a:lnTo>
+                    <a:pt x="5873047" y="1069173"/>
+                  </a:lnTo>
+                  <a:lnTo>
+                    <a:pt x="5801424" y="1061995"/>
+                  </a:lnTo>
+                  <a:lnTo>
+                    <a:pt x="5729802" y="1054493"/>
+                  </a:lnTo>
+                  <a:lnTo>
+                    <a:pt x="5658179" y="1046652"/>
+                  </a:lnTo>
+                  <a:lnTo>
+                    <a:pt x="5586557" y="1038455"/>
+                  </a:lnTo>
+                  <a:lnTo>
+                    <a:pt x="5514934" y="1029888"/>
+                  </a:lnTo>
+                  <a:lnTo>
+                    <a:pt x="5443311" y="1020932"/>
+                  </a:lnTo>
+                  <a:lnTo>
+                    <a:pt x="5371689" y="1011571"/>
+                  </a:lnTo>
+                  <a:lnTo>
+                    <a:pt x="5300066" y="1001787"/>
+                  </a:lnTo>
+                  <a:lnTo>
+                    <a:pt x="5228444" y="991559"/>
+                  </a:lnTo>
+                  <a:lnTo>
+                    <a:pt x="5156821" y="980869"/>
+                  </a:lnTo>
+                  <a:lnTo>
+                    <a:pt x="5085199" y="969694"/>
+                  </a:lnTo>
+                  <a:lnTo>
+                    <a:pt x="5013576" y="958014"/>
+                  </a:lnTo>
+                  <a:lnTo>
+                    <a:pt x="4941954" y="945805"/>
+                  </a:lnTo>
+                  <a:lnTo>
+                    <a:pt x="4870331" y="933043"/>
+                  </a:lnTo>
+                  <a:lnTo>
+                    <a:pt x="4798709" y="919704"/>
+                  </a:lnTo>
+                  <a:lnTo>
+                    <a:pt x="4727086" y="905761"/>
+                  </a:lnTo>
+                  <a:lnTo>
+                    <a:pt x="4655464" y="891186"/>
+                  </a:lnTo>
+                  <a:lnTo>
+                    <a:pt x="4583841" y="875952"/>
+                  </a:lnTo>
+                  <a:lnTo>
+                    <a:pt x="4512219" y="860028"/>
+                  </a:lnTo>
+                  <a:lnTo>
+                    <a:pt x="4440596" y="843383"/>
+                  </a:lnTo>
+                  <a:lnTo>
+                    <a:pt x="4368974" y="825985"/>
+                  </a:lnTo>
+                  <a:lnTo>
+                    <a:pt x="4297351" y="807799"/>
+                  </a:lnTo>
+                  <a:lnTo>
+                    <a:pt x="4225729" y="788790"/>
+                  </a:lnTo>
+                  <a:lnTo>
+                    <a:pt x="4154106" y="768921"/>
+                  </a:lnTo>
+                  <a:lnTo>
+                    <a:pt x="4082483" y="748152"/>
+                  </a:lnTo>
+                  <a:lnTo>
+                    <a:pt x="4010861" y="726443"/>
+                  </a:lnTo>
+                  <a:lnTo>
+                    <a:pt x="3939238" y="703751"/>
+                  </a:lnTo>
+                  <a:lnTo>
+                    <a:pt x="3867616" y="680032"/>
+                  </a:lnTo>
+                  <a:lnTo>
+                    <a:pt x="3795993" y="655239"/>
+                  </a:lnTo>
+                  <a:lnTo>
+                    <a:pt x="3724371" y="629324"/>
+                  </a:lnTo>
+                  <a:lnTo>
+                    <a:pt x="3652748" y="602236"/>
+                  </a:lnTo>
+                  <a:lnTo>
+                    <a:pt x="3581126" y="573921"/>
+                  </a:lnTo>
+                  <a:lnTo>
+                    <a:pt x="3509503" y="544325"/>
+                  </a:lnTo>
+                  <a:lnTo>
+                    <a:pt x="3437881" y="513389"/>
+                  </a:lnTo>
+                  <a:lnTo>
+                    <a:pt x="3366258" y="481053"/>
+                  </a:lnTo>
+                  <a:lnTo>
+                    <a:pt x="3294636" y="447253"/>
+                  </a:lnTo>
+                  <a:lnTo>
+                    <a:pt x="3223013" y="411922"/>
+                  </a:lnTo>
+                  <a:lnTo>
+                    <a:pt x="3151391" y="393689"/>
+                  </a:lnTo>
+                  <a:lnTo>
+                    <a:pt x="3079768" y="386328"/>
+                  </a:lnTo>
+                  <a:lnTo>
+                    <a:pt x="3008146" y="378902"/>
+                  </a:lnTo>
+                  <a:lnTo>
+                    <a:pt x="2936523" y="371410"/>
+                  </a:lnTo>
+                  <a:lnTo>
+                    <a:pt x="2864901" y="363852"/>
+                  </a:lnTo>
+                  <a:lnTo>
+                    <a:pt x="2793278" y="356228"/>
+                  </a:lnTo>
+                  <a:lnTo>
+                    <a:pt x="2721655" y="348536"/>
+                  </a:lnTo>
+                  <a:lnTo>
+                    <a:pt x="2650033" y="340776"/>
+                  </a:lnTo>
+                  <a:lnTo>
+                    <a:pt x="2578410" y="332948"/>
+                  </a:lnTo>
+                  <a:lnTo>
+                    <a:pt x="2506788" y="325050"/>
+                  </a:lnTo>
+                  <a:lnTo>
+                    <a:pt x="2435165" y="317083"/>
+                  </a:lnTo>
+                  <a:lnTo>
+                    <a:pt x="2363543" y="309046"/>
+                  </a:lnTo>
+                  <a:lnTo>
+                    <a:pt x="2291920" y="300938"/>
+                  </a:lnTo>
+                  <a:lnTo>
+                    <a:pt x="2220298" y="292758"/>
+                  </a:lnTo>
+                  <a:lnTo>
+                    <a:pt x="2148675" y="284506"/>
+                  </a:lnTo>
+                  <a:lnTo>
+                    <a:pt x="2077053" y="276181"/>
+                  </a:lnTo>
+                  <a:lnTo>
+                    <a:pt x="2005430" y="267782"/>
+                  </a:lnTo>
+                  <a:lnTo>
+                    <a:pt x="1933808" y="259310"/>
+                  </a:lnTo>
+                  <a:lnTo>
+                    <a:pt x="1862185" y="250763"/>
+                  </a:lnTo>
+                  <a:lnTo>
+                    <a:pt x="1790563" y="242140"/>
+                  </a:lnTo>
+                  <a:lnTo>
+                    <a:pt x="1718940" y="233441"/>
+                  </a:lnTo>
+                  <a:lnTo>
+                    <a:pt x="1647318" y="224666"/>
+                  </a:lnTo>
+                  <a:lnTo>
+                    <a:pt x="1575695" y="215813"/>
+                  </a:lnTo>
+                  <a:lnTo>
+                    <a:pt x="1504073" y="206881"/>
+                  </a:lnTo>
+                  <a:lnTo>
+                    <a:pt x="1432450" y="197871"/>
+                  </a:lnTo>
+                  <a:lnTo>
+                    <a:pt x="1360827" y="188782"/>
+                  </a:lnTo>
+                  <a:lnTo>
+                    <a:pt x="1289205" y="179612"/>
+                  </a:lnTo>
+                  <a:lnTo>
+                    <a:pt x="1217582" y="170361"/>
+                  </a:lnTo>
+                  <a:lnTo>
+                    <a:pt x="1145960" y="161029"/>
+                  </a:lnTo>
+                  <a:lnTo>
+                    <a:pt x="1074337" y="151614"/>
+                  </a:lnTo>
+                  <a:lnTo>
+                    <a:pt x="1002715" y="142117"/>
+                  </a:lnTo>
+                  <a:lnTo>
+                    <a:pt x="931092" y="132535"/>
+                  </a:lnTo>
+                  <a:lnTo>
+                    <a:pt x="859470" y="122869"/>
+                  </a:lnTo>
+                  <a:lnTo>
+                    <a:pt x="787847" y="113117"/>
+                  </a:lnTo>
+                  <a:lnTo>
+                    <a:pt x="716225" y="103280"/>
+                  </a:lnTo>
+                  <a:lnTo>
+                    <a:pt x="644602" y="93355"/>
+                  </a:lnTo>
+                  <a:lnTo>
+                    <a:pt x="572980" y="83343"/>
+                  </a:lnTo>
+                  <a:lnTo>
+                    <a:pt x="501357" y="73243"/>
+                  </a:lnTo>
+                  <a:lnTo>
+                    <a:pt x="429735" y="63053"/>
+                  </a:lnTo>
+                  <a:lnTo>
+                    <a:pt x="358112" y="52774"/>
+                  </a:lnTo>
+                  <a:lnTo>
+                    <a:pt x="286490" y="42404"/>
+                  </a:lnTo>
+                  <a:lnTo>
+                    <a:pt x="214867" y="31942"/>
+                  </a:lnTo>
+                  <a:lnTo>
+                    <a:pt x="143245" y="21388"/>
+                  </a:lnTo>
+                  <a:lnTo>
+                    <a:pt x="71622" y="10741"/>
                   </a:lnTo>
                   <a:lnTo>
                     <a:pt x="0" y="0"/>
@@ -4217,312 +4211,312 @@
           </p:nvSpPr>
           <p:spPr>
             <a:xfrm>
-              <a:off x="1172049" y="2853035"/>
-              <a:ext cx="7090630" cy="2508386"/>
+              <a:off x="1172049" y="2847281"/>
+              <a:ext cx="7090630" cy="2513955"/>
             </a:xfrm>
             <a:custGeom>
               <a:avLst/>
               <a:pathLst>
-                <a:path w="7090630" h="2508386">
+                <a:path w="7090630" h="2513955">
                   <a:moveTo>
                     <a:pt x="0" y="0"/>
                   </a:moveTo>
                   <a:lnTo>
-                    <a:pt x="71622" y="70769"/>
-                  </a:lnTo>
-                  <a:lnTo>
-                    <a:pt x="143245" y="139686"/>
-                  </a:lnTo>
-                  <a:lnTo>
-                    <a:pt x="214867" y="206799"/>
-                  </a:lnTo>
-                  <a:lnTo>
-                    <a:pt x="286490" y="272157"/>
-                  </a:lnTo>
-                  <a:lnTo>
-                    <a:pt x="358112" y="335803"/>
-                  </a:lnTo>
-                  <a:lnTo>
-                    <a:pt x="429735" y="397785"/>
-                  </a:lnTo>
-                  <a:lnTo>
-                    <a:pt x="501357" y="458144"/>
-                  </a:lnTo>
-                  <a:lnTo>
-                    <a:pt x="572980" y="516923"/>
-                  </a:lnTo>
-                  <a:lnTo>
-                    <a:pt x="644602" y="574165"/>
-                  </a:lnTo>
-                  <a:lnTo>
-                    <a:pt x="716225" y="629908"/>
-                  </a:lnTo>
-                  <a:lnTo>
-                    <a:pt x="787847" y="684192"/>
-                  </a:lnTo>
-                  <a:lnTo>
-                    <a:pt x="859470" y="737056"/>
-                  </a:lnTo>
-                  <a:lnTo>
-                    <a:pt x="931092" y="788537"/>
-                  </a:lnTo>
-                  <a:lnTo>
-                    <a:pt x="1002715" y="838670"/>
-                  </a:lnTo>
-                  <a:lnTo>
-                    <a:pt x="1074337" y="887491"/>
-                  </a:lnTo>
-                  <a:lnTo>
-                    <a:pt x="1145960" y="935035"/>
-                  </a:lnTo>
-                  <a:lnTo>
-                    <a:pt x="1217582" y="981334"/>
-                  </a:lnTo>
-                  <a:lnTo>
-                    <a:pt x="1289205" y="1026422"/>
-                  </a:lnTo>
-                  <a:lnTo>
-                    <a:pt x="1360827" y="1070329"/>
-                  </a:lnTo>
-                  <a:lnTo>
-                    <a:pt x="1432450" y="1113088"/>
-                  </a:lnTo>
-                  <a:lnTo>
-                    <a:pt x="1504073" y="1154728"/>
-                  </a:lnTo>
-                  <a:lnTo>
-                    <a:pt x="1575695" y="1195278"/>
-                  </a:lnTo>
-                  <a:lnTo>
-                    <a:pt x="1647318" y="1234767"/>
-                  </a:lnTo>
-                  <a:lnTo>
-                    <a:pt x="1718940" y="1273222"/>
-                  </a:lnTo>
-                  <a:lnTo>
-                    <a:pt x="1790563" y="1310671"/>
-                  </a:lnTo>
-                  <a:lnTo>
-                    <a:pt x="1862185" y="1347140"/>
-                  </a:lnTo>
-                  <a:lnTo>
-                    <a:pt x="1933808" y="1382654"/>
-                  </a:lnTo>
-                  <a:lnTo>
-                    <a:pt x="2005430" y="1417240"/>
-                  </a:lnTo>
-                  <a:lnTo>
-                    <a:pt x="2077053" y="1450920"/>
-                  </a:lnTo>
-                  <a:lnTo>
-                    <a:pt x="2148675" y="1483718"/>
-                  </a:lnTo>
-                  <a:lnTo>
-                    <a:pt x="2220298" y="1515659"/>
-                  </a:lnTo>
-                  <a:lnTo>
-                    <a:pt x="2291920" y="1546763"/>
-                  </a:lnTo>
-                  <a:lnTo>
-                    <a:pt x="2363543" y="1577053"/>
-                  </a:lnTo>
-                  <a:lnTo>
-                    <a:pt x="2435165" y="1606551"/>
-                  </a:lnTo>
-                  <a:lnTo>
-                    <a:pt x="2506788" y="1635277"/>
-                  </a:lnTo>
-                  <a:lnTo>
-                    <a:pt x="2578410" y="1663251"/>
-                  </a:lnTo>
-                  <a:lnTo>
-                    <a:pt x="2650033" y="1690493"/>
-                  </a:lnTo>
-                  <a:lnTo>
-                    <a:pt x="2721655" y="1717022"/>
-                  </a:lnTo>
-                  <a:lnTo>
-                    <a:pt x="2793278" y="1742857"/>
-                  </a:lnTo>
-                  <a:lnTo>
-                    <a:pt x="2864901" y="1768015"/>
-                  </a:lnTo>
-                  <a:lnTo>
-                    <a:pt x="2936523" y="1792516"/>
-                  </a:lnTo>
-                  <a:lnTo>
-                    <a:pt x="3008146" y="1816375"/>
-                  </a:lnTo>
-                  <a:lnTo>
-                    <a:pt x="3079768" y="1839609"/>
-                  </a:lnTo>
-                  <a:lnTo>
-                    <a:pt x="3151391" y="1862236"/>
-                  </a:lnTo>
-                  <a:lnTo>
-                    <a:pt x="3223013" y="1884271"/>
-                  </a:lnTo>
-                  <a:lnTo>
-                    <a:pt x="3294636" y="1905728"/>
-                  </a:lnTo>
-                  <a:lnTo>
-                    <a:pt x="3366258" y="1926625"/>
-                  </a:lnTo>
-                  <a:lnTo>
-                    <a:pt x="3437881" y="1946974"/>
-                  </a:lnTo>
-                  <a:lnTo>
-                    <a:pt x="3509503" y="1966791"/>
-                  </a:lnTo>
-                  <a:lnTo>
-                    <a:pt x="3581126" y="1986090"/>
-                  </a:lnTo>
-                  <a:lnTo>
-                    <a:pt x="3652748" y="2004883"/>
-                  </a:lnTo>
-                  <a:lnTo>
-                    <a:pt x="3724371" y="2023184"/>
-                  </a:lnTo>
-                  <a:lnTo>
-                    <a:pt x="3795993" y="2041007"/>
-                  </a:lnTo>
-                  <a:lnTo>
-                    <a:pt x="3867616" y="2058363"/>
-                  </a:lnTo>
-                  <a:lnTo>
-                    <a:pt x="3939238" y="2075265"/>
-                  </a:lnTo>
-                  <a:lnTo>
-                    <a:pt x="4010861" y="2091724"/>
-                  </a:lnTo>
-                  <a:lnTo>
-                    <a:pt x="4082483" y="2107753"/>
-                  </a:lnTo>
-                  <a:lnTo>
-                    <a:pt x="4154106" y="2123362"/>
-                  </a:lnTo>
-                  <a:lnTo>
-                    <a:pt x="4225729" y="2138563"/>
-                  </a:lnTo>
-                  <a:lnTo>
-                    <a:pt x="4297351" y="2153366"/>
-                  </a:lnTo>
-                  <a:lnTo>
-                    <a:pt x="4368974" y="2167782"/>
-                  </a:lnTo>
-                  <a:lnTo>
-                    <a:pt x="4440596" y="2181820"/>
-                  </a:lnTo>
-                  <a:lnTo>
-                    <a:pt x="4512219" y="2195491"/>
-                  </a:lnTo>
-                  <a:lnTo>
-                    <a:pt x="4583841" y="2208805"/>
-                  </a:lnTo>
-                  <a:lnTo>
-                    <a:pt x="4655464" y="2221769"/>
-                  </a:lnTo>
-                  <a:lnTo>
-                    <a:pt x="4727086" y="2234395"/>
-                  </a:lnTo>
-                  <a:lnTo>
-                    <a:pt x="4798709" y="2246690"/>
-                  </a:lnTo>
-                  <a:lnTo>
-                    <a:pt x="4870331" y="2258664"/>
-                  </a:lnTo>
-                  <a:lnTo>
-                    <a:pt x="4941954" y="2270324"/>
-                  </a:lnTo>
-                  <a:lnTo>
-                    <a:pt x="5013576" y="2281678"/>
-                  </a:lnTo>
-                  <a:lnTo>
-                    <a:pt x="5085199" y="2292736"/>
-                  </a:lnTo>
-                  <a:lnTo>
-                    <a:pt x="5156821" y="2303504"/>
-                  </a:lnTo>
-                  <a:lnTo>
-                    <a:pt x="5228444" y="2313991"/>
-                  </a:lnTo>
-                  <a:lnTo>
-                    <a:pt x="5300066" y="2324203"/>
-                  </a:lnTo>
-                  <a:lnTo>
-                    <a:pt x="5371689" y="2334148"/>
-                  </a:lnTo>
-                  <a:lnTo>
-                    <a:pt x="5443311" y="2343833"/>
-                  </a:lnTo>
-                  <a:lnTo>
-                    <a:pt x="5514934" y="2353264"/>
-                  </a:lnTo>
-                  <a:lnTo>
-                    <a:pt x="5586557" y="2362448"/>
-                  </a:lnTo>
-                  <a:lnTo>
-                    <a:pt x="5658179" y="2371392"/>
-                  </a:lnTo>
-                  <a:lnTo>
-                    <a:pt x="5729802" y="2380102"/>
-                  </a:lnTo>
-                  <a:lnTo>
-                    <a:pt x="5801424" y="2388584"/>
-                  </a:lnTo>
-                  <a:lnTo>
-                    <a:pt x="5873047" y="2396844"/>
-                  </a:lnTo>
-                  <a:lnTo>
-                    <a:pt x="5944669" y="2404888"/>
-                  </a:lnTo>
-                  <a:lnTo>
-                    <a:pt x="6016292" y="2412721"/>
-                  </a:lnTo>
-                  <a:lnTo>
-                    <a:pt x="6087914" y="2420350"/>
-                  </a:lnTo>
-                  <a:lnTo>
-                    <a:pt x="6159537" y="2427778"/>
-                  </a:lnTo>
-                  <a:lnTo>
-                    <a:pt x="6231159" y="2435013"/>
-                  </a:lnTo>
-                  <a:lnTo>
-                    <a:pt x="6302782" y="2442058"/>
-                  </a:lnTo>
-                  <a:lnTo>
-                    <a:pt x="6374404" y="2448918"/>
-                  </a:lnTo>
-                  <a:lnTo>
-                    <a:pt x="6446027" y="2455599"/>
-                  </a:lnTo>
-                  <a:lnTo>
-                    <a:pt x="6517649" y="2462105"/>
-                  </a:lnTo>
-                  <a:lnTo>
-                    <a:pt x="6589272" y="2468441"/>
-                  </a:lnTo>
-                  <a:lnTo>
-                    <a:pt x="6660894" y="2474612"/>
-                  </a:lnTo>
-                  <a:lnTo>
-                    <a:pt x="6732517" y="2480620"/>
-                  </a:lnTo>
-                  <a:lnTo>
-                    <a:pt x="6804139" y="2486472"/>
-                  </a:lnTo>
-                  <a:lnTo>
-                    <a:pt x="6875762" y="2492170"/>
-                  </a:lnTo>
-                  <a:lnTo>
-                    <a:pt x="6947385" y="2497719"/>
-                  </a:lnTo>
-                  <a:lnTo>
-                    <a:pt x="7019007" y="2503123"/>
-                  </a:lnTo>
-                  <a:lnTo>
-                    <a:pt x="7090630" y="2508386"/>
+                    <a:pt x="71622" y="70951"/>
+                  </a:lnTo>
+                  <a:lnTo>
+                    <a:pt x="143245" y="140044"/>
+                  </a:lnTo>
+                  <a:lnTo>
+                    <a:pt x="214867" y="207329"/>
+                  </a:lnTo>
+                  <a:lnTo>
+                    <a:pt x="286490" y="272852"/>
+                  </a:lnTo>
+                  <a:lnTo>
+                    <a:pt x="358112" y="336660"/>
+                  </a:lnTo>
+                  <a:lnTo>
+                    <a:pt x="429735" y="398797"/>
+                  </a:lnTo>
+                  <a:lnTo>
+                    <a:pt x="501357" y="459307"/>
+                  </a:lnTo>
+                  <a:lnTo>
+                    <a:pt x="572980" y="518233"/>
+                  </a:lnTo>
+                  <a:lnTo>
+                    <a:pt x="644602" y="575616"/>
+                  </a:lnTo>
+                  <a:lnTo>
+                    <a:pt x="716225" y="631497"/>
+                  </a:lnTo>
+                  <a:lnTo>
+                    <a:pt x="787847" y="685914"/>
+                  </a:lnTo>
+                  <a:lnTo>
+                    <a:pt x="859470" y="738907"/>
+                  </a:lnTo>
+                  <a:lnTo>
+                    <a:pt x="931092" y="790513"/>
+                  </a:lnTo>
+                  <a:lnTo>
+                    <a:pt x="1002715" y="840767"/>
+                  </a:lnTo>
+                  <a:lnTo>
+                    <a:pt x="1074337" y="889706"/>
+                  </a:lnTo>
+                  <a:lnTo>
+                    <a:pt x="1145960" y="937363"/>
+                  </a:lnTo>
+                  <a:lnTo>
+                    <a:pt x="1217582" y="983773"/>
+                  </a:lnTo>
+                  <a:lnTo>
+                    <a:pt x="1289205" y="1028967"/>
+                  </a:lnTo>
+                  <a:lnTo>
+                    <a:pt x="1360827" y="1072978"/>
+                  </a:lnTo>
+                  <a:lnTo>
+                    <a:pt x="1432450" y="1115837"/>
+                  </a:lnTo>
+                  <a:lnTo>
+                    <a:pt x="1504073" y="1157574"/>
+                  </a:lnTo>
+                  <a:lnTo>
+                    <a:pt x="1575695" y="1198218"/>
+                  </a:lnTo>
+                  <a:lnTo>
+                    <a:pt x="1647318" y="1237798"/>
+                  </a:lnTo>
+                  <a:lnTo>
+                    <a:pt x="1718940" y="1276342"/>
+                  </a:lnTo>
+                  <a:lnTo>
+                    <a:pt x="1790563" y="1313877"/>
+                  </a:lnTo>
+                  <a:lnTo>
+                    <a:pt x="1862185" y="1350429"/>
+                  </a:lnTo>
+                  <a:lnTo>
+                    <a:pt x="1933808" y="1386024"/>
+                  </a:lnTo>
+                  <a:lnTo>
+                    <a:pt x="2005430" y="1420686"/>
+                  </a:lnTo>
+                  <a:lnTo>
+                    <a:pt x="2077053" y="1454442"/>
+                  </a:lnTo>
+                  <a:lnTo>
+                    <a:pt x="2148675" y="1487314"/>
+                  </a:lnTo>
+                  <a:lnTo>
+                    <a:pt x="2220298" y="1519325"/>
+                  </a:lnTo>
+                  <a:lnTo>
+                    <a:pt x="2291920" y="1550498"/>
+                  </a:lnTo>
+                  <a:lnTo>
+                    <a:pt x="2363543" y="1580854"/>
+                  </a:lnTo>
+                  <a:lnTo>
+                    <a:pt x="2435165" y="1610416"/>
+                  </a:lnTo>
+                  <a:lnTo>
+                    <a:pt x="2506788" y="1639204"/>
+                  </a:lnTo>
+                  <a:lnTo>
+                    <a:pt x="2578410" y="1667239"/>
+                  </a:lnTo>
+                  <a:lnTo>
+                    <a:pt x="2650033" y="1694539"/>
+                  </a:lnTo>
+                  <a:lnTo>
+                    <a:pt x="2721655" y="1721124"/>
+                  </a:lnTo>
+                  <a:lnTo>
+                    <a:pt x="2793278" y="1747014"/>
+                  </a:lnTo>
+                  <a:lnTo>
+                    <a:pt x="2864901" y="1772226"/>
+                  </a:lnTo>
+                  <a:lnTo>
+                    <a:pt x="2936523" y="1796777"/>
+                  </a:lnTo>
+                  <a:lnTo>
+                    <a:pt x="3008146" y="1820686"/>
+                  </a:lnTo>
+                  <a:lnTo>
+                    <a:pt x="3079768" y="1843969"/>
+                  </a:lnTo>
+                  <a:lnTo>
+                    <a:pt x="3151391" y="1866642"/>
+                  </a:lnTo>
+                  <a:lnTo>
+                    <a:pt x="3223013" y="1888722"/>
+                  </a:lnTo>
+                  <a:lnTo>
+                    <a:pt x="3294636" y="1910223"/>
+                  </a:lnTo>
+                  <a:lnTo>
+                    <a:pt x="3366258" y="1931162"/>
+                  </a:lnTo>
+                  <a:lnTo>
+                    <a:pt x="3437881" y="1951552"/>
+                  </a:lnTo>
+                  <a:lnTo>
+                    <a:pt x="3509503" y="1971409"/>
+                  </a:lnTo>
+                  <a:lnTo>
+                    <a:pt x="3581126" y="1990745"/>
+                  </a:lnTo>
+                  <a:lnTo>
+                    <a:pt x="3652748" y="2009576"/>
+                  </a:lnTo>
+                  <a:lnTo>
+                    <a:pt x="3724371" y="2027913"/>
+                  </a:lnTo>
+                  <a:lnTo>
+                    <a:pt x="3795993" y="2045770"/>
+                  </a:lnTo>
+                  <a:lnTo>
+                    <a:pt x="3867616" y="2063160"/>
+                  </a:lnTo>
+                  <a:lnTo>
+                    <a:pt x="3939238" y="2080095"/>
+                  </a:lnTo>
+                  <a:lnTo>
+                    <a:pt x="4010861" y="2096586"/>
+                  </a:lnTo>
+                  <a:lnTo>
+                    <a:pt x="4082483" y="2112645"/>
+                  </a:lnTo>
+                  <a:lnTo>
+                    <a:pt x="4154106" y="2128284"/>
+                  </a:lnTo>
+                  <a:lnTo>
+                    <a:pt x="4225729" y="2143513"/>
+                  </a:lnTo>
+                  <a:lnTo>
+                    <a:pt x="4297351" y="2158344"/>
+                  </a:lnTo>
+                  <a:lnTo>
+                    <a:pt x="4368974" y="2172786"/>
+                  </a:lnTo>
+                  <a:lnTo>
+                    <a:pt x="4440596" y="2186851"/>
+                  </a:lnTo>
+                  <a:lnTo>
+                    <a:pt x="4512219" y="2200547"/>
+                  </a:lnTo>
+                  <a:lnTo>
+                    <a:pt x="4583841" y="2213884"/>
+                  </a:lnTo>
+                  <a:lnTo>
+                    <a:pt x="4655464" y="2226872"/>
+                  </a:lnTo>
+                  <a:lnTo>
+                    <a:pt x="4727086" y="2239521"/>
+                  </a:lnTo>
+                  <a:lnTo>
+                    <a:pt x="4798709" y="2251838"/>
+                  </a:lnTo>
+                  <a:lnTo>
+                    <a:pt x="4870331" y="2263832"/>
+                  </a:lnTo>
+                  <a:lnTo>
+                    <a:pt x="4941954" y="2275513"/>
+                  </a:lnTo>
+                  <a:lnTo>
+                    <a:pt x="5013576" y="2286888"/>
+                  </a:lnTo>
+                  <a:lnTo>
+                    <a:pt x="5085199" y="2297964"/>
+                  </a:lnTo>
+                  <a:lnTo>
+                    <a:pt x="5156821" y="2308751"/>
+                  </a:lnTo>
+                  <a:lnTo>
+                    <a:pt x="5228444" y="2319256"/>
+                  </a:lnTo>
+                  <a:lnTo>
+                    <a:pt x="5300066" y="2329485"/>
+                  </a:lnTo>
+                  <a:lnTo>
+                    <a:pt x="5371689" y="2339447"/>
+                  </a:lnTo>
+                  <a:lnTo>
+                    <a:pt x="5443311" y="2349148"/>
+                  </a:lnTo>
+                  <a:lnTo>
+                    <a:pt x="5514934" y="2358595"/>
+                  </a:lnTo>
+                  <a:lnTo>
+                    <a:pt x="5586557" y="2367794"/>
+                  </a:lnTo>
+                  <a:lnTo>
+                    <a:pt x="5658179" y="2376753"/>
+                  </a:lnTo>
+                  <a:lnTo>
+                    <a:pt x="5729802" y="2385477"/>
+                  </a:lnTo>
+                  <a:lnTo>
+                    <a:pt x="5801424" y="2393973"/>
+                  </a:lnTo>
+                  <a:lnTo>
+                    <a:pt x="5873047" y="2402246"/>
+                  </a:lnTo>
+                  <a:lnTo>
+                    <a:pt x="5944669" y="2410302"/>
+                  </a:lnTo>
+                  <a:lnTo>
+                    <a:pt x="6016292" y="2418148"/>
+                  </a:lnTo>
+                  <a:lnTo>
+                    <a:pt x="6087914" y="2425789"/>
+                  </a:lnTo>
+                  <a:lnTo>
+                    <a:pt x="6159537" y="2433229"/>
+                  </a:lnTo>
+                  <a:lnTo>
+                    <a:pt x="6231159" y="2440474"/>
+                  </a:lnTo>
+                  <a:lnTo>
+                    <a:pt x="6302782" y="2447530"/>
+                  </a:lnTo>
+                  <a:lnTo>
+                    <a:pt x="6374404" y="2454401"/>
+                  </a:lnTo>
+                  <a:lnTo>
+                    <a:pt x="6446027" y="2461092"/>
+                  </a:lnTo>
+                  <a:lnTo>
+                    <a:pt x="6517649" y="2467608"/>
+                  </a:lnTo>
+                  <a:lnTo>
+                    <a:pt x="6589272" y="2473954"/>
+                  </a:lnTo>
+                  <a:lnTo>
+                    <a:pt x="6660894" y="2480133"/>
+                  </a:lnTo>
+                  <a:lnTo>
+                    <a:pt x="6732517" y="2486150"/>
+                  </a:lnTo>
+                  <a:lnTo>
+                    <a:pt x="6804139" y="2492010"/>
+                  </a:lnTo>
+                  <a:lnTo>
+                    <a:pt x="6875762" y="2497717"/>
+                  </a:lnTo>
+                  <a:lnTo>
+                    <a:pt x="6947385" y="2503274"/>
+                  </a:lnTo>
+                  <a:lnTo>
+                    <a:pt x="7019007" y="2508685"/>
+                  </a:lnTo>
+                  <a:lnTo>
+                    <a:pt x="7090630" y="2513955"/>
                   </a:lnTo>
                 </a:path>
               </a:pathLst>
@@ -4594,7 +4588,7 @@
           </p:nvSpPr>
           <p:spPr>
             <a:xfrm>
-              <a:off x="4363883" y="2073503"/>
+              <a:off x="4368185" y="2073503"/>
               <a:ext cx="0" cy="3649639"/>
             </a:xfrm>
             <a:custGeom>
@@ -4637,7 +4631,7 @@
           </p:nvSpPr>
           <p:spPr>
             <a:xfrm>
-              <a:off x="3178931" y="2073503"/>
+              <a:off x="3176242" y="2073503"/>
               <a:ext cx="0" cy="3649639"/>
             </a:xfrm>
             <a:custGeom>
@@ -4680,7 +4674,7 @@
           </p:nvSpPr>
           <p:spPr>
             <a:xfrm>
-              <a:off x="5373904" y="2073503"/>
+              <a:off x="5386913" y="2073503"/>
               <a:ext cx="0" cy="3649639"/>
             </a:xfrm>
             <a:custGeom>
@@ -4953,7 +4947,7 @@
           </p:nvSpPr>
           <p:spPr>
             <a:xfrm>
-              <a:off x="1536080" y="5785772"/>
+              <a:off x="1536741" y="5785772"/>
               <a:ext cx="161574" cy="80101"/>
             </a:xfrm>
             <a:prstGeom prst="rect">
@@ -4999,7 +4993,7 @@
           </p:nvSpPr>
           <p:spPr>
             <a:xfrm>
-              <a:off x="3342736" y="5785772"/>
+              <a:off x="3341771" y="5785772"/>
               <a:ext cx="161574" cy="80101"/>
             </a:xfrm>
             <a:prstGeom prst="rect">
@@ -5045,7 +5039,7 @@
           </p:nvSpPr>
           <p:spPr>
             <a:xfrm>
-              <a:off x="5199088" y="5785772"/>
+              <a:off x="5196500" y="5785772"/>
               <a:ext cx="62179" cy="80101"/>
             </a:xfrm>
             <a:prstGeom prst="rect">
@@ -5091,7 +5085,7 @@
           </p:nvSpPr>
           <p:spPr>
             <a:xfrm>
-              <a:off x="6974654" y="5785772"/>
+              <a:off x="6970441" y="5785772"/>
               <a:ext cx="124358" cy="80101"/>
             </a:xfrm>
             <a:prstGeom prst="rect">
@@ -5262,7 +5256,7 @@
                   <a:latin typeface="Helvetica"/>
                   <a:cs typeface="Helvetica"/>
                 </a:rPr>
-                <a:t>subHR per 10 % decline: 1.40 (1.12-1.74), p_Bonf = 0.018 (n = 6)  |  per IQR decline (Δ = 24.3 %): 2.25 (1.32-3.85)  |  IQR: [-22.7, 1.6] %</a:t>
+                <a:t>subHR per 10 % decline: 1.40 (1.12-1.75), p_Bonf = 0.020 (n = 6)  |  per IQR decline (Δ = 24.5 %): 2.27 (1.31-3.92)  |  IQR: [-22.7, 1.8] %</a:t>
               </a:r>
             </a:p>
           </p:txBody>
